--- a/output/wordlabs-attract-3day.pptx
+++ b/output/wordlabs-attract-3day.pptx
@@ -5622,7 +5622,7 @@
                 <a:ea typeface="Trebuchet MS" pitchFamily="34" charset="-122"/>
                 <a:cs typeface="Trebuchet MS" pitchFamily="34" charset="-120"/>
               </a:rPr>
-              <a:t>1</a:t>
+              <a:t>0</a:t>
             </a:r>
             <a:pPr algn="ctr" indent="0" marL="0">
               <a:buNone/>
@@ -6040,7 +6040,7 @@
                 <a:ea typeface="Calibri" pitchFamily="34" charset="-122"/>
                 <a:cs typeface="Calibri" pitchFamily="34" charset="-120"/>
               </a:rPr>
-              <a:t>The colourful posters were </a:t>
+              <a:t>The </a:t>
             </a:r>
             <a:pPr algn="l" indent="0" marL="0">
               <a:buNone/>
@@ -6057,7 +6057,7 @@
                 <a:ea typeface="Calibri" pitchFamily="34" charset="-122"/>
                 <a:cs typeface="Calibri" pitchFamily="34" charset="-120"/>
               </a:rPr>
-              <a:t>attracting</a:t>
+              <a:t>attraction</a:t>
             </a:r>
             <a:pPr algn="l" indent="0" marL="0">
               <a:buNone/>
@@ -6071,7 +6071,7 @@
                 <a:ea typeface="Calibri" pitchFamily="34" charset="-122"/>
                 <a:cs typeface="Calibri" pitchFamily="34" charset="-120"/>
               </a:rPr>
-              <a:t> visitors, and the main </a:t>
+              <a:t> of the science museum was so powerful that it kept </a:t>
             </a:r>
             <a:pPr algn="l" indent="0" marL="0">
               <a:buNone/>
@@ -6088,7 +6088,7 @@
                 <a:ea typeface="Calibri" pitchFamily="34" charset="-122"/>
                 <a:cs typeface="Calibri" pitchFamily="34" charset="-120"/>
               </a:rPr>
-              <a:t>attraction</a:t>
+              <a:t>attracting</a:t>
             </a:r>
             <a:pPr algn="l" indent="0" marL="0">
               <a:buNone/>
@@ -6102,7 +6102,7 @@
                 <a:ea typeface="Calibri" pitchFamily="34" charset="-122"/>
                 <a:cs typeface="Calibri" pitchFamily="34" charset="-120"/>
               </a:rPr>
-              <a:t> was a giant model of the solar system.</a:t>
+              <a:t> students all day.</a:t>
             </a:r>
             <a:endParaRPr lang="en-US" sz="1800" dirty="0"/>
           </a:p>
@@ -6257,7 +6257,7 @@
                 <a:ea typeface="Trebuchet MS" pitchFamily="34" charset="-122"/>
                 <a:cs typeface="Trebuchet MS" pitchFamily="34" charset="-120"/>
               </a:rPr>
-              <a:t>attracting</a:t>
+              <a:t>attraction</a:t>
             </a:r>
             <a:endParaRPr lang="en-US" sz="1400" dirty="0"/>
           </a:p>
@@ -6385,7 +6385,7 @@
                 <a:ea typeface="Trebuchet MS" pitchFamily="34" charset="-122"/>
                 <a:cs typeface="Trebuchet MS" pitchFamily="34" charset="-120"/>
               </a:rPr>
-              <a:t>attraction</a:t>
+              <a:t>attracting</a:t>
             </a:r>
             <a:endParaRPr lang="en-US" sz="1400" dirty="0"/>
           </a:p>
@@ -6855,7 +6855,7 @@
                 <a:ea typeface="Trebuchet MS" pitchFamily="34" charset="-122"/>
                 <a:cs typeface="Trebuchet MS" pitchFamily="34" charset="-120"/>
               </a:rPr>
-              <a:t>attracting</a:t>
+              <a:t>attraction</a:t>
             </a:r>
             <a:endParaRPr lang="en-US" sz="2800" dirty="0"/>
           </a:p>
@@ -7682,7 +7682,7 @@
                 <a:ea typeface="Trebuchet MS" pitchFamily="34" charset="-122"/>
                 <a:cs typeface="Trebuchet MS" pitchFamily="34" charset="-120"/>
               </a:rPr>
-              <a:t>attracting</a:t>
+              <a:t>attraction</a:t>
             </a:r>
             <a:endParaRPr lang="en-US" sz="2800" dirty="0"/>
           </a:p>
@@ -7933,7 +7933,7 @@
                 <a:ea typeface="Trebuchet MS" pitchFamily="34" charset="-122"/>
                 <a:cs typeface="Trebuchet MS" pitchFamily="34" charset="-120"/>
               </a:rPr>
-              <a:t>ing</a:t>
+              <a:t>ion</a:t>
             </a:r>
             <a:endParaRPr lang="en-US" sz="1300" dirty="0"/>
           </a:p>
@@ -7972,7 +7972,7 @@
                 <a:ea typeface="Calibri" pitchFamily="34" charset="-122"/>
                 <a:cs typeface="Calibri" pitchFamily="34" charset="-120"/>
               </a:rPr>
-              <a:t>action happening now</a:t>
+              <a:t>act or result of</a:t>
             </a:r>
             <a:endParaRPr lang="en-US" sz="850" dirty="0"/>
           </a:p>
@@ -8667,7 +8667,7 @@
                 <a:ea typeface="Trebuchet MS" pitchFamily="34" charset="-122"/>
                 <a:cs typeface="Trebuchet MS" pitchFamily="34" charset="-120"/>
               </a:rPr>
-              <a:t>attracting</a:t>
+              <a:t>attraction</a:t>
             </a:r>
             <a:endParaRPr lang="en-US" sz="2800" dirty="0"/>
           </a:p>
@@ -8918,7 +8918,7 @@
                 <a:ea typeface="Trebuchet MS" pitchFamily="34" charset="-122"/>
                 <a:cs typeface="Trebuchet MS" pitchFamily="34" charset="-120"/>
               </a:rPr>
-              <a:t>ing</a:t>
+              <a:t>ion</a:t>
             </a:r>
             <a:endParaRPr lang="en-US" sz="1300" dirty="0"/>
           </a:p>
@@ -8957,7 +8957,7 @@
                 <a:ea typeface="Calibri" pitchFamily="34" charset="-122"/>
                 <a:cs typeface="Calibri" pitchFamily="34" charset="-120"/>
               </a:rPr>
-              <a:t>action happening now</a:t>
+              <a:t>act or result of</a:t>
             </a:r>
             <a:endParaRPr lang="en-US" sz="850" dirty="0"/>
           </a:p>
@@ -9221,7 +9221,7 @@
                 <a:ea typeface="Trebuchet MS" pitchFamily="34" charset="-122"/>
                 <a:cs typeface="Trebuchet MS" pitchFamily="34" charset="-120"/>
               </a:rPr>
-              <a:t>tract</a:t>
+              <a:t>trac</a:t>
             </a:r>
             <a:endParaRPr lang="en-US" sz="1400" dirty="0"/>
           </a:p>
@@ -9326,7 +9326,7 @@
                 <a:ea typeface="Trebuchet MS" pitchFamily="34" charset="-122"/>
                 <a:cs typeface="Trebuchet MS" pitchFamily="34" charset="-120"/>
               </a:rPr>
-              <a:t>ing</a:t>
+              <a:t>tion</a:t>
             </a:r>
             <a:endParaRPr lang="en-US" sz="1400" dirty="0"/>
           </a:p>
@@ -9889,7 +9889,7 @@
                 <a:ea typeface="Trebuchet MS" pitchFamily="34" charset="-122"/>
                 <a:cs typeface="Trebuchet MS" pitchFamily="34" charset="-120"/>
               </a:rPr>
-              <a:t>attracting</a:t>
+              <a:t>attraction</a:t>
             </a:r>
             <a:endParaRPr lang="en-US" sz="2800" dirty="0"/>
           </a:p>
@@ -10140,7 +10140,7 @@
                 <a:ea typeface="Trebuchet MS" pitchFamily="34" charset="-122"/>
                 <a:cs typeface="Trebuchet MS" pitchFamily="34" charset="-120"/>
               </a:rPr>
-              <a:t>ing</a:t>
+              <a:t>ion</a:t>
             </a:r>
             <a:endParaRPr lang="en-US" sz="1300" dirty="0"/>
           </a:p>
@@ -10179,7 +10179,7 @@
                 <a:ea typeface="Calibri" pitchFamily="34" charset="-122"/>
                 <a:cs typeface="Calibri" pitchFamily="34" charset="-120"/>
               </a:rPr>
-              <a:t>action happening now</a:t>
+              <a:t>act or result of</a:t>
             </a:r>
             <a:endParaRPr lang="en-US" sz="850" dirty="0"/>
           </a:p>
@@ -10443,7 +10443,7 @@
                 <a:ea typeface="Trebuchet MS" pitchFamily="34" charset="-122"/>
                 <a:cs typeface="Trebuchet MS" pitchFamily="34" charset="-120"/>
               </a:rPr>
-              <a:t>tract</a:t>
+              <a:t>trac</a:t>
             </a:r>
             <a:endParaRPr lang="en-US" sz="1400" dirty="0"/>
           </a:p>
@@ -10548,7 +10548,7 @@
                 <a:ea typeface="Trebuchet MS" pitchFamily="34" charset="-122"/>
                 <a:cs typeface="Trebuchet MS" pitchFamily="34" charset="-120"/>
               </a:rPr>
-              <a:t>ing</a:t>
+              <a:t>tion</a:t>
             </a:r>
             <a:endParaRPr lang="en-US" sz="1400" dirty="0"/>
           </a:p>
@@ -10629,11 +10629,11 @@
         <p:spPr>
           <a:xfrm>
             <a:off x="1874520" y="4096512"/>
-            <a:ext cx="6903720" cy="658368"/>
+            <a:ext cx="6903720" cy="804672"/>
           </a:xfrm>
           <a:prstGeom prst="rect">
             <a:avLst>
-              <a:gd name="adj" fmla="val 8333"/>
+              <a:gd name="adj" fmla="val 6818"/>
             </a:avLst>
           </a:prstGeom>
           <a:solidFill>
@@ -10655,12 +10655,12 @@
         </p:nvSpPr>
         <p:spPr>
           <a:xfrm>
-            <a:off x="2023872" y="4169664"/>
-            <a:ext cx="685800" cy="475488"/>
+            <a:off x="2124837" y="4169664"/>
+            <a:ext cx="685800" cy="384048"/>
           </a:xfrm>
           <a:prstGeom prst="rect">
             <a:avLst>
-              <a:gd name="adj" fmla="val 7692"/>
+              <a:gd name="adj" fmla="val 9524"/>
             </a:avLst>
           </a:prstGeom>
           <a:solidFill>
@@ -10682,8 +10682,8 @@
         </p:nvSpPr>
         <p:spPr>
           <a:xfrm>
-            <a:off x="2023872" y="4169664"/>
-            <a:ext cx="685800" cy="475488"/>
+            <a:off x="2124837" y="4169664"/>
+            <a:ext cx="685800" cy="384048"/>
           </a:xfrm>
           <a:prstGeom prst="rect">
             <a:avLst/>
@@ -10721,12 +10721,12 @@
         </p:nvSpPr>
         <p:spPr>
           <a:xfrm>
-            <a:off x="2831592" y="4169664"/>
-            <a:ext cx="685800" cy="475488"/>
+            <a:off x="3033522" y="4169664"/>
+            <a:ext cx="685800" cy="384048"/>
           </a:xfrm>
           <a:prstGeom prst="rect">
             <a:avLst>
-              <a:gd name="adj" fmla="val 7692"/>
+              <a:gd name="adj" fmla="val 9524"/>
             </a:avLst>
           </a:prstGeom>
           <a:solidFill>
@@ -10748,8 +10748,8 @@
         </p:nvSpPr>
         <p:spPr>
           <a:xfrm>
-            <a:off x="2831592" y="4169664"/>
-            <a:ext cx="685800" cy="475488"/>
+            <a:off x="3033522" y="4169664"/>
+            <a:ext cx="685800" cy="384048"/>
           </a:xfrm>
           <a:prstGeom prst="rect">
             <a:avLst/>
@@ -10787,12 +10787,12 @@
         </p:nvSpPr>
         <p:spPr>
           <a:xfrm>
-            <a:off x="3639312" y="4169664"/>
-            <a:ext cx="685800" cy="475488"/>
+            <a:off x="3942207" y="4169664"/>
+            <a:ext cx="685800" cy="384048"/>
           </a:xfrm>
           <a:prstGeom prst="rect">
             <a:avLst>
-              <a:gd name="adj" fmla="val 7692"/>
+              <a:gd name="adj" fmla="val 9524"/>
             </a:avLst>
           </a:prstGeom>
           <a:solidFill>
@@ -10814,8 +10814,8 @@
         </p:nvSpPr>
         <p:spPr>
           <a:xfrm>
-            <a:off x="3639312" y="4169664"/>
-            <a:ext cx="685800" cy="475488"/>
+            <a:off x="3942207" y="4169664"/>
+            <a:ext cx="685800" cy="384048"/>
           </a:xfrm>
           <a:prstGeom prst="rect">
             <a:avLst/>
@@ -10853,12 +10853,12 @@
         </p:nvSpPr>
         <p:spPr>
           <a:xfrm>
-            <a:off x="4447032" y="4169664"/>
-            <a:ext cx="685800" cy="475488"/>
+            <a:off x="4850892" y="4169664"/>
+            <a:ext cx="685800" cy="384048"/>
           </a:xfrm>
           <a:prstGeom prst="rect">
             <a:avLst>
-              <a:gd name="adj" fmla="val 7692"/>
+              <a:gd name="adj" fmla="val 9524"/>
             </a:avLst>
           </a:prstGeom>
           <a:solidFill>
@@ -10880,8 +10880,8 @@
         </p:nvSpPr>
         <p:spPr>
           <a:xfrm>
-            <a:off x="4447032" y="4169664"/>
-            <a:ext cx="685800" cy="475488"/>
+            <a:off x="4850892" y="4169664"/>
+            <a:ext cx="685800" cy="384048"/>
           </a:xfrm>
           <a:prstGeom prst="rect">
             <a:avLst/>
@@ -10919,12 +10919,12 @@
         </p:nvSpPr>
         <p:spPr>
           <a:xfrm>
-            <a:off x="5254752" y="4169664"/>
-            <a:ext cx="685800" cy="475488"/>
+            <a:off x="5759577" y="4169664"/>
+            <a:ext cx="685800" cy="384048"/>
           </a:xfrm>
           <a:prstGeom prst="rect">
             <a:avLst>
-              <a:gd name="adj" fmla="val 7692"/>
+              <a:gd name="adj" fmla="val 9524"/>
             </a:avLst>
           </a:prstGeom>
           <a:solidFill>
@@ -10946,8 +10946,8 @@
         </p:nvSpPr>
         <p:spPr>
           <a:xfrm>
-            <a:off x="5254752" y="4169664"/>
-            <a:ext cx="685800" cy="475488"/>
+            <a:off x="5759577" y="4169664"/>
+            <a:ext cx="685800" cy="384048"/>
           </a:xfrm>
           <a:prstGeom prst="rect">
             <a:avLst/>
@@ -10985,12 +10985,12 @@
         </p:nvSpPr>
         <p:spPr>
           <a:xfrm>
-            <a:off x="6062472" y="4169664"/>
-            <a:ext cx="685800" cy="475488"/>
+            <a:off x="6668262" y="4169664"/>
+            <a:ext cx="685800" cy="384048"/>
           </a:xfrm>
           <a:prstGeom prst="rect">
             <a:avLst>
-              <a:gd name="adj" fmla="val 7692"/>
+              <a:gd name="adj" fmla="val 9524"/>
             </a:avLst>
           </a:prstGeom>
           <a:solidFill>
@@ -11012,8 +11012,8 @@
         </p:nvSpPr>
         <p:spPr>
           <a:xfrm>
-            <a:off x="6062472" y="4169664"/>
-            <a:ext cx="685800" cy="475488"/>
+            <a:off x="6668262" y="4169664"/>
+            <a:ext cx="685800" cy="384048"/>
           </a:xfrm>
           <a:prstGeom prst="rect">
             <a:avLst/>
@@ -11051,12 +11051,12 @@
         </p:nvSpPr>
         <p:spPr>
           <a:xfrm>
-            <a:off x="6870192" y="4169664"/>
-            <a:ext cx="685800" cy="475488"/>
+            <a:off x="7576947" y="4169664"/>
+            <a:ext cx="685800" cy="384048"/>
           </a:xfrm>
           <a:prstGeom prst="rect">
             <a:avLst>
-              <a:gd name="adj" fmla="val 7692"/>
+              <a:gd name="adj" fmla="val 9524"/>
             </a:avLst>
           </a:prstGeom>
           <a:solidFill>
@@ -11078,8 +11078,8 @@
         </p:nvSpPr>
         <p:spPr>
           <a:xfrm>
-            <a:off x="6870192" y="4169664"/>
-            <a:ext cx="685800" cy="475488"/>
+            <a:off x="7576947" y="4169664"/>
+            <a:ext cx="685800" cy="384048"/>
           </a:xfrm>
           <a:prstGeom prst="rect">
             <a:avLst/>
@@ -11103,7 +11103,7 @@
                 <a:ea typeface="Trebuchet MS" pitchFamily="34" charset="-122"/>
                 <a:cs typeface="Trebuchet MS" pitchFamily="34" charset="-120"/>
               </a:rPr>
-              <a:t>i</a:t>
+              <a:t>ion</a:t>
             </a:r>
             <a:endParaRPr lang="en-US" sz="900" dirty="0"/>
           </a:p>
@@ -11111,67 +11111,40 @@
       </p:sp>
       <p:sp>
         <p:nvSpPr>
-          <p:cNvPr id="50" name="Shape 48"/>
-          <p:cNvSpPr/>
-          <p:nvPr/>
-        </p:nvSpPr>
-        <p:spPr>
-          <a:xfrm>
-            <a:off x="7677912" y="4169664"/>
-            <a:ext cx="685800" cy="475488"/>
-          </a:xfrm>
-          <a:prstGeom prst="rect">
-            <a:avLst>
-              <a:gd name="adj" fmla="val 7692"/>
-            </a:avLst>
-          </a:prstGeom>
-          <a:solidFill>
-            <a:srgbClr val="FFFFFF"/>
-          </a:solidFill>
-          <a:ln w="12700">
-            <a:solidFill>
-              <a:srgbClr val="DB2777"/>
-            </a:solidFill>
-            <a:prstDash val="solid"/>
-          </a:ln>
-        </p:spPr>
-      </p:sp>
-      <p:sp>
-        <p:nvSpPr>
-          <p:cNvPr id="51" name="Text 49"/>
-          <p:cNvSpPr/>
-          <p:nvPr/>
-        </p:nvSpPr>
-        <p:spPr>
-          <a:xfrm>
-            <a:off x="7677912" y="4169664"/>
-            <a:ext cx="685800" cy="475488"/>
-          </a:xfrm>
-          <a:prstGeom prst="rect">
-            <a:avLst/>
-          </a:prstGeom>
-          <a:noFill/>
-          <a:ln/>
-        </p:spPr>
-        <p:txBody>
-          <a:bodyPr wrap="square" lIns="0" tIns="0" rIns="0" bIns="0" rtlCol="0" anchor="ctr"/>
-          <a:lstStyle/>
-          <a:p>
-            <a:pPr algn="ctr" indent="0" marL="0">
-              <a:buNone/>
-            </a:pPr>
-            <a:r>
-              <a:rPr lang="en-US" sz="900" b="1" dirty="0">
-                <a:solidFill>
-                  <a:srgbClr val="9D174D"/>
-                </a:solidFill>
-                <a:latin typeface="Trebuchet MS" pitchFamily="34" charset="0"/>
-                <a:ea typeface="Trebuchet MS" pitchFamily="34" charset="-122"/>
-                <a:cs typeface="Trebuchet MS" pitchFamily="34" charset="-120"/>
-              </a:rPr>
-              <a:t>ng</a:t>
-            </a:r>
-            <a:endParaRPr lang="en-US" sz="900" dirty="0"/>
+          <p:cNvPr id="50" name="Text 48"/>
+          <p:cNvSpPr/>
+          <p:nvPr/>
+        </p:nvSpPr>
+        <p:spPr>
+          <a:xfrm>
+            <a:off x="7576947" y="4572000"/>
+            <a:ext cx="685800" cy="219456"/>
+          </a:xfrm>
+          <a:prstGeom prst="rect">
+            <a:avLst/>
+          </a:prstGeom>
+          <a:noFill/>
+          <a:ln/>
+        </p:spPr>
+        <p:txBody>
+          <a:bodyPr wrap="square" lIns="0" tIns="0" rIns="0" bIns="0" rtlCol="0" anchor="t"/>
+          <a:lstStyle/>
+          <a:p>
+            <a:pPr algn="ctr" indent="0" marL="0">
+              <a:buNone/>
+            </a:pPr>
+            <a:r>
+              <a:rPr lang="en-US" sz="750" i="1" dirty="0">
+                <a:solidFill>
+                  <a:srgbClr val="94A3B8"/>
+                </a:solidFill>
+                <a:latin typeface="Calibri" pitchFamily="34" charset="0"/>
+                <a:ea typeface="Calibri" pitchFamily="34" charset="-122"/>
+                <a:cs typeface="Calibri" pitchFamily="34" charset="-120"/>
+              </a:rPr>
+              <a:t>/shun/</a:t>
+            </a:r>
+            <a:endParaRPr lang="en-US" sz="750" dirty="0"/>
           </a:p>
         </p:txBody>
       </p:sp>
@@ -11600,7 +11573,7 @@
                 <a:ea typeface="Trebuchet MS" pitchFamily="34" charset="-122"/>
                 <a:cs typeface="Trebuchet MS" pitchFamily="34" charset="-120"/>
               </a:rPr>
-              <a:t>attraction</a:t>
+              <a:t>attracting</a:t>
             </a:r>
             <a:endParaRPr lang="en-US" sz="2800" dirty="0"/>
           </a:p>
@@ -12427,7 +12400,7 @@
                 <a:ea typeface="Trebuchet MS" pitchFamily="34" charset="-122"/>
                 <a:cs typeface="Trebuchet MS" pitchFamily="34" charset="-120"/>
               </a:rPr>
-              <a:t>attraction</a:t>
+              <a:t>attracting</a:t>
             </a:r>
             <a:endParaRPr lang="en-US" sz="2800" dirty="0"/>
           </a:p>
@@ -12678,7 +12651,7 @@
                 <a:ea typeface="Trebuchet MS" pitchFamily="34" charset="-122"/>
                 <a:cs typeface="Trebuchet MS" pitchFamily="34" charset="-120"/>
               </a:rPr>
-              <a:t>ion</a:t>
+              <a:t>ing</a:t>
             </a:r>
             <a:endParaRPr lang="en-US" sz="1300" dirty="0"/>
           </a:p>
@@ -12717,7 +12690,7 @@
                 <a:ea typeface="Calibri" pitchFamily="34" charset="-122"/>
                 <a:cs typeface="Calibri" pitchFamily="34" charset="-120"/>
               </a:rPr>
-              <a:t>state or result of an action</a:t>
+              <a:t>ongoing action</a:t>
             </a:r>
             <a:endParaRPr lang="en-US" sz="850" dirty="0"/>
           </a:p>
@@ -13412,7 +13385,7 @@
                 <a:ea typeface="Trebuchet MS" pitchFamily="34" charset="-122"/>
                 <a:cs typeface="Trebuchet MS" pitchFamily="34" charset="-120"/>
               </a:rPr>
-              <a:t>attraction</a:t>
+              <a:t>attracting</a:t>
             </a:r>
             <a:endParaRPr lang="en-US" sz="2800" dirty="0"/>
           </a:p>
@@ -13663,7 +13636,7 @@
                 <a:ea typeface="Trebuchet MS" pitchFamily="34" charset="-122"/>
                 <a:cs typeface="Trebuchet MS" pitchFamily="34" charset="-120"/>
               </a:rPr>
-              <a:t>ion</a:t>
+              <a:t>ing</a:t>
             </a:r>
             <a:endParaRPr lang="en-US" sz="1300" dirty="0"/>
           </a:p>
@@ -13702,7 +13675,7 @@
                 <a:ea typeface="Calibri" pitchFamily="34" charset="-122"/>
                 <a:cs typeface="Calibri" pitchFamily="34" charset="-120"/>
               </a:rPr>
-              <a:t>state or result of an action</a:t>
+              <a:t>ongoing action</a:t>
             </a:r>
             <a:endParaRPr lang="en-US" sz="850" dirty="0"/>
           </a:p>
@@ -13966,7 +13939,7 @@
                 <a:ea typeface="Trebuchet MS" pitchFamily="34" charset="-122"/>
                 <a:cs typeface="Trebuchet MS" pitchFamily="34" charset="-120"/>
               </a:rPr>
-              <a:t>trac</a:t>
+              <a:t>tract</a:t>
             </a:r>
             <a:endParaRPr lang="en-US" sz="1400" dirty="0"/>
           </a:p>
@@ -14071,7 +14044,7 @@
                 <a:ea typeface="Trebuchet MS" pitchFamily="34" charset="-122"/>
                 <a:cs typeface="Trebuchet MS" pitchFamily="34" charset="-120"/>
               </a:rPr>
-              <a:t>tion</a:t>
+              <a:t>ing</a:t>
             </a:r>
             <a:endParaRPr lang="en-US" sz="1400" dirty="0"/>
           </a:p>
@@ -14899,7 +14872,7 @@
                 <a:ea typeface="Trebuchet MS" pitchFamily="34" charset="-122"/>
                 <a:cs typeface="Trebuchet MS" pitchFamily="34" charset="-120"/>
               </a:rPr>
-              <a:t>attraction</a:t>
+              <a:t>attracting</a:t>
             </a:r>
             <a:endParaRPr lang="en-US" sz="2800" dirty="0"/>
           </a:p>
@@ -15150,7 +15123,7 @@
                 <a:ea typeface="Trebuchet MS" pitchFamily="34" charset="-122"/>
                 <a:cs typeface="Trebuchet MS" pitchFamily="34" charset="-120"/>
               </a:rPr>
-              <a:t>ion</a:t>
+              <a:t>ing</a:t>
             </a:r>
             <a:endParaRPr lang="en-US" sz="1300" dirty="0"/>
           </a:p>
@@ -15189,7 +15162,7 @@
                 <a:ea typeface="Calibri" pitchFamily="34" charset="-122"/>
                 <a:cs typeface="Calibri" pitchFamily="34" charset="-120"/>
               </a:rPr>
-              <a:t>state or result of an action</a:t>
+              <a:t>ongoing action</a:t>
             </a:r>
             <a:endParaRPr lang="en-US" sz="850" dirty="0"/>
           </a:p>
@@ -15453,7 +15426,7 @@
                 <a:ea typeface="Trebuchet MS" pitchFamily="34" charset="-122"/>
                 <a:cs typeface="Trebuchet MS" pitchFamily="34" charset="-120"/>
               </a:rPr>
-              <a:t>trac</a:t>
+              <a:t>tract</a:t>
             </a:r>
             <a:endParaRPr lang="en-US" sz="1400" dirty="0"/>
           </a:p>
@@ -15558,7 +15531,7 @@
                 <a:ea typeface="Trebuchet MS" pitchFamily="34" charset="-122"/>
                 <a:cs typeface="Trebuchet MS" pitchFamily="34" charset="-120"/>
               </a:rPr>
-              <a:t>tion</a:t>
+              <a:t>ing</a:t>
             </a:r>
             <a:endParaRPr lang="en-US" sz="1400" dirty="0"/>
           </a:p>
@@ -15639,11 +15612,11 @@
         <p:spPr>
           <a:xfrm>
             <a:off x="1874520" y="4096512"/>
-            <a:ext cx="6903720" cy="804672"/>
+            <a:ext cx="6903720" cy="658368"/>
           </a:xfrm>
           <a:prstGeom prst="rect">
             <a:avLst>
-              <a:gd name="adj" fmla="val 6818"/>
+              <a:gd name="adj" fmla="val 8333"/>
             </a:avLst>
           </a:prstGeom>
           <a:solidFill>
@@ -15666,11 +15639,11 @@
         <p:spPr>
           <a:xfrm>
             <a:off x="2023872" y="4169664"/>
-            <a:ext cx="685800" cy="384048"/>
+            <a:ext cx="685800" cy="475488"/>
           </a:xfrm>
           <a:prstGeom prst="rect">
             <a:avLst>
-              <a:gd name="adj" fmla="val 9524"/>
+              <a:gd name="adj" fmla="val 7692"/>
             </a:avLst>
           </a:prstGeom>
           <a:solidFill>
@@ -15693,7 +15666,7 @@
         <p:spPr>
           <a:xfrm>
             <a:off x="2023872" y="4169664"/>
-            <a:ext cx="685800" cy="384048"/>
+            <a:ext cx="685800" cy="475488"/>
           </a:xfrm>
           <a:prstGeom prst="rect">
             <a:avLst/>
@@ -15732,11 +15705,11 @@
         <p:spPr>
           <a:xfrm>
             <a:off x="2831592" y="4169664"/>
-            <a:ext cx="685800" cy="384048"/>
+            <a:ext cx="685800" cy="475488"/>
           </a:xfrm>
           <a:prstGeom prst="rect">
             <a:avLst>
-              <a:gd name="adj" fmla="val 9524"/>
+              <a:gd name="adj" fmla="val 7692"/>
             </a:avLst>
           </a:prstGeom>
           <a:solidFill>
@@ -15759,7 +15732,7 @@
         <p:spPr>
           <a:xfrm>
             <a:off x="2831592" y="4169664"/>
-            <a:ext cx="685800" cy="384048"/>
+            <a:ext cx="685800" cy="475488"/>
           </a:xfrm>
           <a:prstGeom prst="rect">
             <a:avLst/>
@@ -15798,11 +15771,11 @@
         <p:spPr>
           <a:xfrm>
             <a:off x="3639312" y="4169664"/>
-            <a:ext cx="685800" cy="384048"/>
+            <a:ext cx="685800" cy="475488"/>
           </a:xfrm>
           <a:prstGeom prst="rect">
             <a:avLst>
-              <a:gd name="adj" fmla="val 9524"/>
+              <a:gd name="adj" fmla="val 7692"/>
             </a:avLst>
           </a:prstGeom>
           <a:solidFill>
@@ -15825,7 +15798,7 @@
         <p:spPr>
           <a:xfrm>
             <a:off x="3639312" y="4169664"/>
-            <a:ext cx="685800" cy="384048"/>
+            <a:ext cx="685800" cy="475488"/>
           </a:xfrm>
           <a:prstGeom prst="rect">
             <a:avLst/>
@@ -15864,11 +15837,11 @@
         <p:spPr>
           <a:xfrm>
             <a:off x="4447032" y="4169664"/>
-            <a:ext cx="685800" cy="384048"/>
+            <a:ext cx="685800" cy="475488"/>
           </a:xfrm>
           <a:prstGeom prst="rect">
             <a:avLst>
-              <a:gd name="adj" fmla="val 9524"/>
+              <a:gd name="adj" fmla="val 7692"/>
             </a:avLst>
           </a:prstGeom>
           <a:solidFill>
@@ -15891,7 +15864,7 @@
         <p:spPr>
           <a:xfrm>
             <a:off x="4447032" y="4169664"/>
-            <a:ext cx="685800" cy="384048"/>
+            <a:ext cx="685800" cy="475488"/>
           </a:xfrm>
           <a:prstGeom prst="rect">
             <a:avLst/>
@@ -15930,11 +15903,11 @@
         <p:spPr>
           <a:xfrm>
             <a:off x="5254752" y="4169664"/>
-            <a:ext cx="685800" cy="384048"/>
+            <a:ext cx="685800" cy="475488"/>
           </a:xfrm>
           <a:prstGeom prst="rect">
             <a:avLst>
-              <a:gd name="adj" fmla="val 9524"/>
+              <a:gd name="adj" fmla="val 7692"/>
             </a:avLst>
           </a:prstGeom>
           <a:solidFill>
@@ -15957,7 +15930,7 @@
         <p:spPr>
           <a:xfrm>
             <a:off x="5254752" y="4169664"/>
-            <a:ext cx="685800" cy="384048"/>
+            <a:ext cx="685800" cy="475488"/>
           </a:xfrm>
           <a:prstGeom prst="rect">
             <a:avLst/>
@@ -15996,11 +15969,11 @@
         <p:spPr>
           <a:xfrm>
             <a:off x="6062472" y="4169664"/>
-            <a:ext cx="685800" cy="384048"/>
+            <a:ext cx="685800" cy="475488"/>
           </a:xfrm>
           <a:prstGeom prst="rect">
             <a:avLst>
-              <a:gd name="adj" fmla="val 9524"/>
+              <a:gd name="adj" fmla="val 7692"/>
             </a:avLst>
           </a:prstGeom>
           <a:solidFill>
@@ -16023,7 +15996,7 @@
         <p:spPr>
           <a:xfrm>
             <a:off x="6062472" y="4169664"/>
-            <a:ext cx="685800" cy="384048"/>
+            <a:ext cx="685800" cy="475488"/>
           </a:xfrm>
           <a:prstGeom prst="rect">
             <a:avLst/>
@@ -16062,11 +16035,11 @@
         <p:spPr>
           <a:xfrm>
             <a:off x="6870192" y="4169664"/>
-            <a:ext cx="685800" cy="384048"/>
+            <a:ext cx="685800" cy="475488"/>
           </a:xfrm>
           <a:prstGeom prst="rect">
             <a:avLst>
-              <a:gd name="adj" fmla="val 9524"/>
+              <a:gd name="adj" fmla="val 7692"/>
             </a:avLst>
           </a:prstGeom>
           <a:solidFill>
@@ -16089,7 +16062,7 @@
         <p:spPr>
           <a:xfrm>
             <a:off x="6870192" y="4169664"/>
-            <a:ext cx="685800" cy="384048"/>
+            <a:ext cx="685800" cy="475488"/>
           </a:xfrm>
           <a:prstGeom prst="rect">
             <a:avLst/>
@@ -16113,7 +16086,7 @@
                 <a:ea typeface="Trebuchet MS" pitchFamily="34" charset="-122"/>
                 <a:cs typeface="Trebuchet MS" pitchFamily="34" charset="-120"/>
               </a:rPr>
-              <a:t>io</a:t>
+              <a:t>i</a:t>
             </a:r>
             <a:endParaRPr lang="en-US" sz="900" dirty="0"/>
           </a:p>
@@ -16121,57 +16094,18 @@
       </p:sp>
       <p:sp>
         <p:nvSpPr>
-          <p:cNvPr id="50" name="Text 48"/>
-          <p:cNvSpPr/>
-          <p:nvPr/>
-        </p:nvSpPr>
-        <p:spPr>
-          <a:xfrm>
-            <a:off x="6870192" y="4572000"/>
-            <a:ext cx="685800" cy="219456"/>
-          </a:xfrm>
-          <a:prstGeom prst="rect">
-            <a:avLst/>
-          </a:prstGeom>
-          <a:noFill/>
-          <a:ln/>
-        </p:spPr>
-        <p:txBody>
-          <a:bodyPr wrap="square" lIns="0" tIns="0" rIns="0" bIns="0" rtlCol="0" anchor="t"/>
-          <a:lstStyle/>
-          <a:p>
-            <a:pPr algn="ctr" indent="0" marL="0">
-              <a:buNone/>
-            </a:pPr>
-            <a:r>
-              <a:rPr lang="en-US" sz="750" i="1" dirty="0">
-                <a:solidFill>
-                  <a:srgbClr val="94A3B8"/>
-                </a:solidFill>
-                <a:latin typeface="Calibri" pitchFamily="34" charset="0"/>
-                <a:ea typeface="Calibri" pitchFamily="34" charset="-122"/>
-                <a:cs typeface="Calibri" pitchFamily="34" charset="-120"/>
-              </a:rPr>
-              <a:t>/sh/</a:t>
-            </a:r>
-            <a:endParaRPr lang="en-US" sz="750" dirty="0"/>
-          </a:p>
-        </p:txBody>
-      </p:sp>
-      <p:sp>
-        <p:nvSpPr>
-          <p:cNvPr id="51" name="Shape 49"/>
+          <p:cNvPr id="50" name="Shape 48"/>
           <p:cNvSpPr/>
           <p:nvPr/>
         </p:nvSpPr>
         <p:spPr>
           <a:xfrm>
             <a:off x="7677912" y="4169664"/>
-            <a:ext cx="685800" cy="384048"/>
+            <a:ext cx="685800" cy="475488"/>
           </a:xfrm>
           <a:prstGeom prst="rect">
             <a:avLst>
-              <a:gd name="adj" fmla="val 9524"/>
+              <a:gd name="adj" fmla="val 7692"/>
             </a:avLst>
           </a:prstGeom>
           <a:solidFill>
@@ -16187,14 +16121,14 @@
       </p:sp>
       <p:sp>
         <p:nvSpPr>
-          <p:cNvPr id="52" name="Text 50"/>
+          <p:cNvPr id="51" name="Text 49"/>
           <p:cNvSpPr/>
           <p:nvPr/>
         </p:nvSpPr>
         <p:spPr>
           <a:xfrm>
             <a:off x="7677912" y="4169664"/>
-            <a:ext cx="685800" cy="384048"/>
+            <a:ext cx="685800" cy="475488"/>
           </a:xfrm>
           <a:prstGeom prst="rect">
             <a:avLst/>
@@ -16218,7 +16152,7 @@
                 <a:ea typeface="Trebuchet MS" pitchFamily="34" charset="-122"/>
                 <a:cs typeface="Trebuchet MS" pitchFamily="34" charset="-120"/>
               </a:rPr>
-              <a:t>n</a:t>
+              <a:t>ng</a:t>
             </a:r>
             <a:endParaRPr lang="en-US" sz="900" dirty="0"/>
           </a:p>
@@ -17126,7 +17060,7 @@
                 <a:ea typeface="Trebuchet MS" pitchFamily="34" charset="-122"/>
                 <a:cs typeface="Trebuchet MS" pitchFamily="34" charset="-120"/>
               </a:rPr>
-              <a:t>2</a:t>
+              <a:t>1</a:t>
             </a:r>
             <a:pPr algn="ctr" indent="0" marL="0">
               <a:buNone/>
@@ -17140,7 +17074,7 @@
                 <a:ea typeface="Trebuchet MS" pitchFamily="34" charset="-122"/>
                 <a:cs typeface="Trebuchet MS" pitchFamily="34" charset="-120"/>
               </a:rPr>
-              <a:t>  punctuation marks</a:t>
+              <a:t>  punctuation mark</a:t>
             </a:r>
             <a:endParaRPr lang="en-US" sz="2800" dirty="0"/>
           </a:p>
@@ -17544,7 +17478,7 @@
                 <a:ea typeface="Calibri" pitchFamily="34" charset="-122"/>
                 <a:cs typeface="Calibri" pitchFamily="34" charset="-120"/>
               </a:rPr>
-              <a:t>The </a:t>
+              <a:t>Although the </a:t>
             </a:r>
             <a:pPr algn="l" indent="0" marL="0">
               <a:buNone/>
@@ -17561,7 +17495,7 @@
                 <a:ea typeface="Calibri" pitchFamily="34" charset="-122"/>
                 <a:cs typeface="Calibri" pitchFamily="34" charset="-120"/>
               </a:rPr>
-              <a:t>attractive</a:t>
+              <a:t>unattractive</a:t>
             </a:r>
             <a:pPr algn="l" indent="0" marL="0">
               <a:buNone/>
@@ -17575,7 +17509,7 @@
                 <a:ea typeface="Calibri" pitchFamily="34" charset="-122"/>
                 <a:cs typeface="Calibri" pitchFamily="34" charset="-120"/>
               </a:rPr>
-              <a:t> display was </a:t>
+              <a:t> old building was not </a:t>
             </a:r>
             <a:pPr algn="l" indent="0" marL="0">
               <a:buNone/>
@@ -17592,7 +17526,7 @@
                 <a:ea typeface="Calibri" pitchFamily="34" charset="-122"/>
                 <a:cs typeface="Calibri" pitchFamily="34" charset="-120"/>
               </a:rPr>
-              <a:t>attracting</a:t>
+              <a:t>attractive</a:t>
             </a:r>
             <a:pPr algn="l" indent="0" marL="0">
               <a:buNone/>
@@ -17606,7 +17540,7 @@
                 <a:ea typeface="Calibri" pitchFamily="34" charset="-122"/>
                 <a:cs typeface="Calibri" pitchFamily="34" charset="-120"/>
               </a:rPr>
-              <a:t> a large crowd, but the greatest </a:t>
+              <a:t>, its historical charm </a:t>
             </a:r>
             <a:pPr algn="l" indent="0" marL="0">
               <a:buNone/>
@@ -17623,7 +17557,7 @@
                 <a:ea typeface="Calibri" pitchFamily="34" charset="-122"/>
                 <a:cs typeface="Calibri" pitchFamily="34" charset="-120"/>
               </a:rPr>
-              <a:t>attraction</a:t>
+              <a:t>attracted</a:t>
             </a:r>
             <a:pPr algn="l" indent="0" marL="0">
               <a:buNone/>
@@ -17637,7 +17571,7 @@
                 <a:ea typeface="Calibri" pitchFamily="34" charset="-122"/>
                 <a:cs typeface="Calibri" pitchFamily="34" charset="-120"/>
               </a:rPr>
-              <a:t> was the live science experiment at the back of the hall.</a:t>
+              <a:t> hundreds of visitors.</a:t>
             </a:r>
             <a:endParaRPr lang="en-US" sz="1800" dirty="0"/>
           </a:p>
@@ -17792,7 +17726,7 @@
                 <a:ea typeface="Trebuchet MS" pitchFamily="34" charset="-122"/>
                 <a:cs typeface="Trebuchet MS" pitchFamily="34" charset="-120"/>
               </a:rPr>
-              <a:t>attractive</a:t>
+              <a:t>unattractive</a:t>
             </a:r>
             <a:endParaRPr lang="en-US" sz="1400" dirty="0"/>
           </a:p>
@@ -17920,7 +17854,7 @@
                 <a:ea typeface="Trebuchet MS" pitchFamily="34" charset="-122"/>
                 <a:cs typeface="Trebuchet MS" pitchFamily="34" charset="-120"/>
               </a:rPr>
-              <a:t>attracting</a:t>
+              <a:t>attractive</a:t>
             </a:r>
             <a:endParaRPr lang="en-US" sz="1400" dirty="0"/>
           </a:p>
@@ -18048,7 +17982,7 @@
                 <a:ea typeface="Trebuchet MS" pitchFamily="34" charset="-122"/>
                 <a:cs typeface="Trebuchet MS" pitchFamily="34" charset="-120"/>
               </a:rPr>
-              <a:t>attraction</a:t>
+              <a:t>attracted</a:t>
             </a:r>
             <a:endParaRPr lang="en-US" sz="1400" dirty="0"/>
           </a:p>
@@ -18518,7 +18452,7 @@
                 <a:ea typeface="Trebuchet MS" pitchFamily="34" charset="-122"/>
                 <a:cs typeface="Trebuchet MS" pitchFamily="34" charset="-120"/>
               </a:rPr>
-              <a:t>attractive</a:t>
+              <a:t>unattractive</a:t>
             </a:r>
             <a:endParaRPr lang="en-US" sz="2800" dirty="0"/>
           </a:p>
@@ -19345,7 +19279,7 @@
                 <a:ea typeface="Trebuchet MS" pitchFamily="34" charset="-122"/>
                 <a:cs typeface="Trebuchet MS" pitchFamily="34" charset="-120"/>
               </a:rPr>
-              <a:t>attractive</a:t>
+              <a:t>unattractive</a:t>
             </a:r>
             <a:endParaRPr lang="en-US" sz="2800" dirty="0"/>
           </a:p>
@@ -19425,7 +19359,7 @@
         </p:nvSpPr>
         <p:spPr>
           <a:xfrm>
-            <a:off x="2938272" y="2258568"/>
+            <a:off x="2221992" y="2258568"/>
             <a:ext cx="1828800" cy="292608"/>
           </a:xfrm>
           <a:prstGeom prst="rect">
@@ -19434,11 +19368,11 @@
             </a:avLst>
           </a:prstGeom>
           <a:solidFill>
-            <a:srgbClr val="CCFBF1"/>
+            <a:srgbClr val="DDD6FE"/>
           </a:solidFill>
           <a:ln w="19050">
             <a:solidFill>
-              <a:srgbClr val="0D9488"/>
+              <a:srgbClr val="7C3AED"/>
             </a:solidFill>
             <a:prstDash val="solid"/>
           </a:ln>
@@ -19459,7 +19393,7 @@
         </p:nvSpPr>
         <p:spPr>
           <a:xfrm>
-            <a:off x="2938272" y="2258568"/>
+            <a:off x="2221992" y="2258568"/>
             <a:ext cx="1828800" cy="292608"/>
           </a:xfrm>
           <a:prstGeom prst="rect">
@@ -19478,13 +19412,13 @@
             <a:r>
               <a:rPr lang="en-US" sz="1300" b="1" dirty="0">
                 <a:solidFill>
-                  <a:srgbClr val="0F766E"/>
+                  <a:srgbClr val="4C1D95"/>
                 </a:solidFill>
                 <a:latin typeface="Trebuchet MS" pitchFamily="34" charset="0"/>
                 <a:ea typeface="Trebuchet MS" pitchFamily="34" charset="-122"/>
                 <a:cs typeface="Trebuchet MS" pitchFamily="34" charset="-120"/>
               </a:rPr>
-              <a:t>attract</a:t>
+              <a:t>un</a:t>
             </a:r>
             <a:endParaRPr lang="en-US" sz="1300" dirty="0"/>
           </a:p>
@@ -19498,7 +19432,7 @@
         </p:nvSpPr>
         <p:spPr>
           <a:xfrm>
-            <a:off x="2938272" y="2569464"/>
+            <a:off x="2221992" y="2569464"/>
             <a:ext cx="1828800" cy="201168"/>
           </a:xfrm>
           <a:prstGeom prst="rect">
@@ -19523,7 +19457,7 @@
                 <a:ea typeface="Calibri" pitchFamily="34" charset="-122"/>
                 <a:cs typeface="Calibri" pitchFamily="34" charset="-120"/>
               </a:rPr>
-              <a:t>to draw or pull toward</a:t>
+              <a:t>not</a:t>
             </a:r>
             <a:endParaRPr lang="en-US" sz="850" dirty="0"/>
           </a:p>
@@ -19537,7 +19471,7 @@
         </p:nvSpPr>
         <p:spPr>
           <a:xfrm>
-            <a:off x="5803392" y="2258568"/>
+            <a:off x="4370832" y="2258568"/>
             <a:ext cx="1828800" cy="292608"/>
           </a:xfrm>
           <a:prstGeom prst="rect">
@@ -19546,11 +19480,11 @@
             </a:avLst>
           </a:prstGeom>
           <a:solidFill>
-            <a:srgbClr val="FCE7F3"/>
+            <a:srgbClr val="CCFBF1"/>
           </a:solidFill>
           <a:ln w="19050">
             <a:solidFill>
-              <a:srgbClr val="DB2777"/>
+              <a:srgbClr val="0D9488"/>
             </a:solidFill>
             <a:prstDash val="solid"/>
           </a:ln>
@@ -19571,7 +19505,7 @@
         </p:nvSpPr>
         <p:spPr>
           <a:xfrm>
-            <a:off x="5803392" y="2258568"/>
+            <a:off x="4370832" y="2258568"/>
             <a:ext cx="1828800" cy="292608"/>
           </a:xfrm>
           <a:prstGeom prst="rect">
@@ -19590,13 +19524,13 @@
             <a:r>
               <a:rPr lang="en-US" sz="1300" b="1" dirty="0">
                 <a:solidFill>
-                  <a:srgbClr val="9D174D"/>
+                  <a:srgbClr val="0F766E"/>
                 </a:solidFill>
                 <a:latin typeface="Trebuchet MS" pitchFamily="34" charset="0"/>
                 <a:ea typeface="Trebuchet MS" pitchFamily="34" charset="-122"/>
                 <a:cs typeface="Trebuchet MS" pitchFamily="34" charset="-120"/>
               </a:rPr>
-              <a:t>ive</a:t>
+              <a:t>attract</a:t>
             </a:r>
             <a:endParaRPr lang="en-US" sz="1300" dirty="0"/>
           </a:p>
@@ -19610,7 +19544,7 @@
         </p:nvSpPr>
         <p:spPr>
           <a:xfrm>
-            <a:off x="5803392" y="2569464"/>
+            <a:off x="4370832" y="2569464"/>
             <a:ext cx="1828800" cy="201168"/>
           </a:xfrm>
           <a:prstGeom prst="rect">
@@ -19635,6 +19569,118 @@
                 <a:ea typeface="Calibri" pitchFamily="34" charset="-122"/>
                 <a:cs typeface="Calibri" pitchFamily="34" charset="-120"/>
               </a:rPr>
+              <a:t>to draw or pull toward</a:t>
+            </a:r>
+            <a:endParaRPr lang="en-US" sz="850" dirty="0"/>
+          </a:p>
+        </p:txBody>
+      </p:sp>
+      <p:sp>
+        <p:nvSpPr>
+          <p:cNvPr id="22" name="Shape 20"/>
+          <p:cNvSpPr/>
+          <p:nvPr/>
+        </p:nvSpPr>
+        <p:spPr>
+          <a:xfrm>
+            <a:off x="6519672" y="2258568"/>
+            <a:ext cx="1828800" cy="292608"/>
+          </a:xfrm>
+          <a:prstGeom prst="rect">
+            <a:avLst>
+              <a:gd name="adj" fmla="val 25000"/>
+            </a:avLst>
+          </a:prstGeom>
+          <a:solidFill>
+            <a:srgbClr val="FCE7F3"/>
+          </a:solidFill>
+          <a:ln w="19050">
+            <a:solidFill>
+              <a:srgbClr val="DB2777"/>
+            </a:solidFill>
+            <a:prstDash val="solid"/>
+          </a:ln>
+          <a:effectLst>
+            <a:outerShdw sx="100000" sy="100000" kx="0" ky="0" algn="bl" rotWithShape="0" blurRad="101600" dist="38100" dir="8100000">
+              <a:srgbClr val="000000">
+                <a:alpha val="12000"/>
+              </a:srgbClr>
+            </a:outerShdw>
+          </a:effectLst>
+        </p:spPr>
+      </p:sp>
+      <p:sp>
+        <p:nvSpPr>
+          <p:cNvPr id="23" name="Text 21"/>
+          <p:cNvSpPr/>
+          <p:nvPr/>
+        </p:nvSpPr>
+        <p:spPr>
+          <a:xfrm>
+            <a:off x="6519672" y="2258568"/>
+            <a:ext cx="1828800" cy="292608"/>
+          </a:xfrm>
+          <a:prstGeom prst="rect">
+            <a:avLst/>
+          </a:prstGeom>
+          <a:noFill/>
+          <a:ln/>
+        </p:spPr>
+        <p:txBody>
+          <a:bodyPr wrap="square" lIns="0" tIns="0" rIns="0" bIns="0" rtlCol="0" anchor="ctr"/>
+          <a:lstStyle/>
+          <a:p>
+            <a:pPr algn="ctr" indent="0" marL="0">
+              <a:buNone/>
+            </a:pPr>
+            <a:r>
+              <a:rPr lang="en-US" sz="1300" b="1" dirty="0">
+                <a:solidFill>
+                  <a:srgbClr val="9D174D"/>
+                </a:solidFill>
+                <a:latin typeface="Trebuchet MS" pitchFamily="34" charset="0"/>
+                <a:ea typeface="Trebuchet MS" pitchFamily="34" charset="-122"/>
+                <a:cs typeface="Trebuchet MS" pitchFamily="34" charset="-120"/>
+              </a:rPr>
+              <a:t>ive</a:t>
+            </a:r>
+            <a:endParaRPr lang="en-US" sz="1300" dirty="0"/>
+          </a:p>
+        </p:txBody>
+      </p:sp>
+      <p:sp>
+        <p:nvSpPr>
+          <p:cNvPr id="24" name="Text 22"/>
+          <p:cNvSpPr/>
+          <p:nvPr/>
+        </p:nvSpPr>
+        <p:spPr>
+          <a:xfrm>
+            <a:off x="6519672" y="2569464"/>
+            <a:ext cx="1828800" cy="201168"/>
+          </a:xfrm>
+          <a:prstGeom prst="rect">
+            <a:avLst/>
+          </a:prstGeom>
+          <a:noFill/>
+          <a:ln/>
+        </p:spPr>
+        <p:txBody>
+          <a:bodyPr wrap="square" lIns="0" tIns="0" rIns="0" bIns="0" rtlCol="0" anchor="t"/>
+          <a:lstStyle/>
+          <a:p>
+            <a:pPr algn="ctr" indent="0" marL="0">
+              <a:buNone/>
+            </a:pPr>
+            <a:r>
+              <a:rPr lang="en-US" sz="850" dirty="0">
+                <a:solidFill>
+                  <a:srgbClr val="475569"/>
+                </a:solidFill>
+                <a:latin typeface="Calibri" pitchFamily="34" charset="0"/>
+                <a:ea typeface="Calibri" pitchFamily="34" charset="-122"/>
+                <a:cs typeface="Calibri" pitchFamily="34" charset="-120"/>
+              </a:rPr>
               <a:t>having the quality of</a:t>
             </a:r>
             <a:endParaRPr lang="en-US" sz="850" dirty="0"/>
@@ -19643,7 +19689,7 @@
       </p:sp>
       <p:sp>
         <p:nvSpPr>
-          <p:cNvPr id="22" name="Shape 20"/>
+          <p:cNvPr id="25" name="Shape 23"/>
           <p:cNvSpPr/>
           <p:nvPr/>
         </p:nvSpPr>
@@ -19670,7 +19716,7 @@
       </p:sp>
       <p:sp>
         <p:nvSpPr>
-          <p:cNvPr id="23" name="Text 21"/>
+          <p:cNvPr id="26" name="Text 24"/>
           <p:cNvSpPr/>
           <p:nvPr/>
         </p:nvSpPr>
@@ -19709,7 +19755,7 @@
       </p:sp>
       <p:sp>
         <p:nvSpPr>
-          <p:cNvPr id="24" name="Shape 22"/>
+          <p:cNvPr id="27" name="Shape 25"/>
           <p:cNvSpPr/>
           <p:nvPr/>
         </p:nvSpPr>
@@ -19736,7 +19782,7 @@
       </p:sp>
       <p:sp>
         <p:nvSpPr>
-          <p:cNvPr id="25" name="Text 23"/>
+          <p:cNvPr id="28" name="Text 26"/>
           <p:cNvSpPr/>
           <p:nvPr/>
         </p:nvSpPr>
@@ -19775,7 +19821,7 @@
       </p:sp>
       <p:sp>
         <p:nvSpPr>
-          <p:cNvPr id="26" name="Shape 24"/>
+          <p:cNvPr id="29" name="Shape 27"/>
           <p:cNvSpPr/>
           <p:nvPr/>
         </p:nvSpPr>
@@ -19802,7 +19848,7 @@
       </p:sp>
       <p:sp>
         <p:nvSpPr>
-          <p:cNvPr id="27" name="Text 25"/>
+          <p:cNvPr id="30" name="Text 28"/>
           <p:cNvSpPr/>
           <p:nvPr/>
         </p:nvSpPr>
@@ -19841,7 +19887,7 @@
       </p:sp>
       <p:sp>
         <p:nvSpPr>
-          <p:cNvPr id="28" name="Shape 26"/>
+          <p:cNvPr id="31" name="Shape 29"/>
           <p:cNvSpPr/>
           <p:nvPr/>
         </p:nvSpPr>
@@ -19868,7 +19914,7 @@
       </p:sp>
       <p:sp>
         <p:nvSpPr>
-          <p:cNvPr id="29" name="Text 27"/>
+          <p:cNvPr id="32" name="Text 30"/>
           <p:cNvSpPr/>
           <p:nvPr/>
         </p:nvSpPr>
@@ -20330,7 +20376,7 @@
                 <a:ea typeface="Trebuchet MS" pitchFamily="34" charset="-122"/>
                 <a:cs typeface="Trebuchet MS" pitchFamily="34" charset="-120"/>
               </a:rPr>
-              <a:t>attractive</a:t>
+              <a:t>unattractive</a:t>
             </a:r>
             <a:endParaRPr lang="en-US" sz="2800" dirty="0"/>
           </a:p>
@@ -20410,7 +20456,7 @@
         </p:nvSpPr>
         <p:spPr>
           <a:xfrm>
-            <a:off x="2938272" y="2258568"/>
+            <a:off x="2221992" y="2258568"/>
             <a:ext cx="1828800" cy="292608"/>
           </a:xfrm>
           <a:prstGeom prst="rect">
@@ -20419,11 +20465,11 @@
             </a:avLst>
           </a:prstGeom>
           <a:solidFill>
-            <a:srgbClr val="CCFBF1"/>
+            <a:srgbClr val="DDD6FE"/>
           </a:solidFill>
           <a:ln w="19050">
             <a:solidFill>
-              <a:srgbClr val="0D9488"/>
+              <a:srgbClr val="7C3AED"/>
             </a:solidFill>
             <a:prstDash val="solid"/>
           </a:ln>
@@ -20444,7 +20490,7 @@
         </p:nvSpPr>
         <p:spPr>
           <a:xfrm>
-            <a:off x="2938272" y="2258568"/>
+            <a:off x="2221992" y="2258568"/>
             <a:ext cx="1828800" cy="292608"/>
           </a:xfrm>
           <a:prstGeom prst="rect">
@@ -20463,13 +20509,13 @@
             <a:r>
               <a:rPr lang="en-US" sz="1300" b="1" dirty="0">
                 <a:solidFill>
-                  <a:srgbClr val="0F766E"/>
+                  <a:srgbClr val="4C1D95"/>
                 </a:solidFill>
                 <a:latin typeface="Trebuchet MS" pitchFamily="34" charset="0"/>
                 <a:ea typeface="Trebuchet MS" pitchFamily="34" charset="-122"/>
                 <a:cs typeface="Trebuchet MS" pitchFamily="34" charset="-120"/>
               </a:rPr>
-              <a:t>attract</a:t>
+              <a:t>un</a:t>
             </a:r>
             <a:endParaRPr lang="en-US" sz="1300" dirty="0"/>
           </a:p>
@@ -20483,7 +20529,7 @@
         </p:nvSpPr>
         <p:spPr>
           <a:xfrm>
-            <a:off x="2938272" y="2569464"/>
+            <a:off x="2221992" y="2569464"/>
             <a:ext cx="1828800" cy="201168"/>
           </a:xfrm>
           <a:prstGeom prst="rect">
@@ -20508,7 +20554,7 @@
                 <a:ea typeface="Calibri" pitchFamily="34" charset="-122"/>
                 <a:cs typeface="Calibri" pitchFamily="34" charset="-120"/>
               </a:rPr>
-              <a:t>to draw or pull toward</a:t>
+              <a:t>not</a:t>
             </a:r>
             <a:endParaRPr lang="en-US" sz="850" dirty="0"/>
           </a:p>
@@ -20522,7 +20568,7 @@
         </p:nvSpPr>
         <p:spPr>
           <a:xfrm>
-            <a:off x="5803392" y="2258568"/>
+            <a:off x="4370832" y="2258568"/>
             <a:ext cx="1828800" cy="292608"/>
           </a:xfrm>
           <a:prstGeom prst="rect">
@@ -20531,11 +20577,11 @@
             </a:avLst>
           </a:prstGeom>
           <a:solidFill>
-            <a:srgbClr val="FCE7F3"/>
+            <a:srgbClr val="CCFBF1"/>
           </a:solidFill>
           <a:ln w="19050">
             <a:solidFill>
-              <a:srgbClr val="DB2777"/>
+              <a:srgbClr val="0D9488"/>
             </a:solidFill>
             <a:prstDash val="solid"/>
           </a:ln>
@@ -20556,7 +20602,7 @@
         </p:nvSpPr>
         <p:spPr>
           <a:xfrm>
-            <a:off x="5803392" y="2258568"/>
+            <a:off x="4370832" y="2258568"/>
             <a:ext cx="1828800" cy="292608"/>
           </a:xfrm>
           <a:prstGeom prst="rect">
@@ -20575,13 +20621,13 @@
             <a:r>
               <a:rPr lang="en-US" sz="1300" b="1" dirty="0">
                 <a:solidFill>
-                  <a:srgbClr val="9D174D"/>
+                  <a:srgbClr val="0F766E"/>
                 </a:solidFill>
                 <a:latin typeface="Trebuchet MS" pitchFamily="34" charset="0"/>
                 <a:ea typeface="Trebuchet MS" pitchFamily="34" charset="-122"/>
                 <a:cs typeface="Trebuchet MS" pitchFamily="34" charset="-120"/>
               </a:rPr>
-              <a:t>ive</a:t>
+              <a:t>attract</a:t>
             </a:r>
             <a:endParaRPr lang="en-US" sz="1300" dirty="0"/>
           </a:p>
@@ -20595,7 +20641,7 @@
         </p:nvSpPr>
         <p:spPr>
           <a:xfrm>
-            <a:off x="5803392" y="2569464"/>
+            <a:off x="4370832" y="2569464"/>
             <a:ext cx="1828800" cy="201168"/>
           </a:xfrm>
           <a:prstGeom prst="rect">
@@ -20620,6 +20666,118 @@
                 <a:ea typeface="Calibri" pitchFamily="34" charset="-122"/>
                 <a:cs typeface="Calibri" pitchFamily="34" charset="-120"/>
               </a:rPr>
+              <a:t>to draw or pull toward</a:t>
+            </a:r>
+            <a:endParaRPr lang="en-US" sz="850" dirty="0"/>
+          </a:p>
+        </p:txBody>
+      </p:sp>
+      <p:sp>
+        <p:nvSpPr>
+          <p:cNvPr id="22" name="Shape 20"/>
+          <p:cNvSpPr/>
+          <p:nvPr/>
+        </p:nvSpPr>
+        <p:spPr>
+          <a:xfrm>
+            <a:off x="6519672" y="2258568"/>
+            <a:ext cx="1828800" cy="292608"/>
+          </a:xfrm>
+          <a:prstGeom prst="rect">
+            <a:avLst>
+              <a:gd name="adj" fmla="val 25000"/>
+            </a:avLst>
+          </a:prstGeom>
+          <a:solidFill>
+            <a:srgbClr val="FCE7F3"/>
+          </a:solidFill>
+          <a:ln w="19050">
+            <a:solidFill>
+              <a:srgbClr val="DB2777"/>
+            </a:solidFill>
+            <a:prstDash val="solid"/>
+          </a:ln>
+          <a:effectLst>
+            <a:outerShdw sx="100000" sy="100000" kx="0" ky="0" algn="bl" rotWithShape="0" blurRad="101600" dist="38100" dir="8100000">
+              <a:srgbClr val="000000">
+                <a:alpha val="12000"/>
+              </a:srgbClr>
+            </a:outerShdw>
+          </a:effectLst>
+        </p:spPr>
+      </p:sp>
+      <p:sp>
+        <p:nvSpPr>
+          <p:cNvPr id="23" name="Text 21"/>
+          <p:cNvSpPr/>
+          <p:nvPr/>
+        </p:nvSpPr>
+        <p:spPr>
+          <a:xfrm>
+            <a:off x="6519672" y="2258568"/>
+            <a:ext cx="1828800" cy="292608"/>
+          </a:xfrm>
+          <a:prstGeom prst="rect">
+            <a:avLst/>
+          </a:prstGeom>
+          <a:noFill/>
+          <a:ln/>
+        </p:spPr>
+        <p:txBody>
+          <a:bodyPr wrap="square" lIns="0" tIns="0" rIns="0" bIns="0" rtlCol="0" anchor="ctr"/>
+          <a:lstStyle/>
+          <a:p>
+            <a:pPr algn="ctr" indent="0" marL="0">
+              <a:buNone/>
+            </a:pPr>
+            <a:r>
+              <a:rPr lang="en-US" sz="1300" b="1" dirty="0">
+                <a:solidFill>
+                  <a:srgbClr val="9D174D"/>
+                </a:solidFill>
+                <a:latin typeface="Trebuchet MS" pitchFamily="34" charset="0"/>
+                <a:ea typeface="Trebuchet MS" pitchFamily="34" charset="-122"/>
+                <a:cs typeface="Trebuchet MS" pitchFamily="34" charset="-120"/>
+              </a:rPr>
+              <a:t>ive</a:t>
+            </a:r>
+            <a:endParaRPr lang="en-US" sz="1300" dirty="0"/>
+          </a:p>
+        </p:txBody>
+      </p:sp>
+      <p:sp>
+        <p:nvSpPr>
+          <p:cNvPr id="24" name="Text 22"/>
+          <p:cNvSpPr/>
+          <p:nvPr/>
+        </p:nvSpPr>
+        <p:spPr>
+          <a:xfrm>
+            <a:off x="6519672" y="2569464"/>
+            <a:ext cx="1828800" cy="201168"/>
+          </a:xfrm>
+          <a:prstGeom prst="rect">
+            <a:avLst/>
+          </a:prstGeom>
+          <a:noFill/>
+          <a:ln/>
+        </p:spPr>
+        <p:txBody>
+          <a:bodyPr wrap="square" lIns="0" tIns="0" rIns="0" bIns="0" rtlCol="0" anchor="t"/>
+          <a:lstStyle/>
+          <a:p>
+            <a:pPr algn="ctr" indent="0" marL="0">
+              <a:buNone/>
+            </a:pPr>
+            <a:r>
+              <a:rPr lang="en-US" sz="850" dirty="0">
+                <a:solidFill>
+                  <a:srgbClr val="475569"/>
+                </a:solidFill>
+                <a:latin typeface="Calibri" pitchFamily="34" charset="0"/>
+                <a:ea typeface="Calibri" pitchFamily="34" charset="-122"/>
+                <a:cs typeface="Calibri" pitchFamily="34" charset="-120"/>
+              </a:rPr>
               <a:t>having the quality of</a:t>
             </a:r>
             <a:endParaRPr lang="en-US" sz="850" dirty="0"/>
@@ -20628,7 +20786,7 @@
       </p:sp>
       <p:sp>
         <p:nvSpPr>
-          <p:cNvPr id="22" name="Shape 20"/>
+          <p:cNvPr id="25" name="Shape 23"/>
           <p:cNvSpPr/>
           <p:nvPr/>
         </p:nvSpPr>
@@ -20655,7 +20813,7 @@
       </p:sp>
       <p:sp>
         <p:nvSpPr>
-          <p:cNvPr id="23" name="Text 21"/>
+          <p:cNvPr id="26" name="Text 24"/>
           <p:cNvSpPr/>
           <p:nvPr/>
         </p:nvSpPr>
@@ -20694,7 +20852,7 @@
       </p:sp>
       <p:sp>
         <p:nvSpPr>
-          <p:cNvPr id="24" name="Shape 22"/>
+          <p:cNvPr id="27" name="Shape 25"/>
           <p:cNvSpPr/>
           <p:nvPr/>
         </p:nvSpPr>
@@ -20721,14 +20879,14 @@
       </p:sp>
       <p:sp>
         <p:nvSpPr>
-          <p:cNvPr id="25" name="Shape 23"/>
-          <p:cNvSpPr/>
-          <p:nvPr/>
-        </p:nvSpPr>
-        <p:spPr>
-          <a:xfrm>
-            <a:off x="2313432" y="3364992"/>
-            <a:ext cx="1645920" cy="475488"/>
+          <p:cNvPr id="28" name="Shape 26"/>
+          <p:cNvSpPr/>
+          <p:nvPr/>
+        </p:nvSpPr>
+        <p:spPr>
+          <a:xfrm>
+            <a:off x="1975104" y="3364992"/>
+            <a:ext cx="1554480" cy="475488"/>
           </a:xfrm>
           <a:prstGeom prst="rect">
             <a:avLst>
@@ -20748,14 +20906,14 @@
       </p:sp>
       <p:sp>
         <p:nvSpPr>
-          <p:cNvPr id="26" name="Text 24"/>
-          <p:cNvSpPr/>
-          <p:nvPr/>
-        </p:nvSpPr>
-        <p:spPr>
-          <a:xfrm>
-            <a:off x="2313432" y="3364992"/>
-            <a:ext cx="1645920" cy="475488"/>
+          <p:cNvPr id="29" name="Text 27"/>
+          <p:cNvSpPr/>
+          <p:nvPr/>
+        </p:nvSpPr>
+        <p:spPr>
+          <a:xfrm>
+            <a:off x="1975104" y="3364992"/>
+            <a:ext cx="1554480" cy="475488"/>
           </a:xfrm>
           <a:prstGeom prst="rect">
             <a:avLst/>
@@ -20779,7 +20937,7 @@
                 <a:ea typeface="Trebuchet MS" pitchFamily="34" charset="-122"/>
                 <a:cs typeface="Trebuchet MS" pitchFamily="34" charset="-120"/>
               </a:rPr>
-              <a:t>at</a:t>
+              <a:t>un</a:t>
             </a:r>
             <a:endParaRPr lang="en-US" sz="1400" dirty="0"/>
           </a:p>
@@ -20787,14 +20945,14 @@
       </p:sp>
       <p:sp>
         <p:nvSpPr>
-          <p:cNvPr id="27" name="Text 25"/>
-          <p:cNvSpPr/>
-          <p:nvPr/>
-        </p:nvSpPr>
-        <p:spPr>
-          <a:xfrm>
-            <a:off x="3959352" y="3364992"/>
-            <a:ext cx="411480" cy="475488"/>
+          <p:cNvPr id="30" name="Text 28"/>
+          <p:cNvSpPr/>
+          <p:nvPr/>
+        </p:nvSpPr>
+        <p:spPr>
+          <a:xfrm>
+            <a:off x="3529584" y="3364992"/>
+            <a:ext cx="73152" cy="475488"/>
           </a:xfrm>
           <a:prstGeom prst="rect">
             <a:avLst/>
@@ -20826,14 +20984,14 @@
       </p:sp>
       <p:sp>
         <p:nvSpPr>
-          <p:cNvPr id="28" name="Shape 26"/>
-          <p:cNvSpPr/>
-          <p:nvPr/>
-        </p:nvSpPr>
-        <p:spPr>
-          <a:xfrm>
-            <a:off x="4370832" y="3364992"/>
-            <a:ext cx="1645920" cy="475488"/>
+          <p:cNvPr id="31" name="Shape 29"/>
+          <p:cNvSpPr/>
+          <p:nvPr/>
+        </p:nvSpPr>
+        <p:spPr>
+          <a:xfrm>
+            <a:off x="3602736" y="3364992"/>
+            <a:ext cx="1554480" cy="475488"/>
           </a:xfrm>
           <a:prstGeom prst="rect">
             <a:avLst>
@@ -20853,14 +21011,14 @@
       </p:sp>
       <p:sp>
         <p:nvSpPr>
-          <p:cNvPr id="29" name="Text 27"/>
-          <p:cNvSpPr/>
-          <p:nvPr/>
-        </p:nvSpPr>
-        <p:spPr>
-          <a:xfrm>
-            <a:off x="4370832" y="3364992"/>
-            <a:ext cx="1645920" cy="475488"/>
+          <p:cNvPr id="32" name="Text 30"/>
+          <p:cNvSpPr/>
+          <p:nvPr/>
+        </p:nvSpPr>
+        <p:spPr>
+          <a:xfrm>
+            <a:off x="3602736" y="3364992"/>
+            <a:ext cx="1554480" cy="475488"/>
           </a:xfrm>
           <a:prstGeom prst="rect">
             <a:avLst/>
@@ -20884,7 +21042,7 @@
                 <a:ea typeface="Trebuchet MS" pitchFamily="34" charset="-122"/>
                 <a:cs typeface="Trebuchet MS" pitchFamily="34" charset="-120"/>
               </a:rPr>
-              <a:t>trac</a:t>
+              <a:t>at</a:t>
             </a:r>
             <a:endParaRPr lang="en-US" sz="1400" dirty="0"/>
           </a:p>
@@ -20892,14 +21050,14 @@
       </p:sp>
       <p:sp>
         <p:nvSpPr>
-          <p:cNvPr id="30" name="Text 28"/>
-          <p:cNvSpPr/>
-          <p:nvPr/>
-        </p:nvSpPr>
-        <p:spPr>
-          <a:xfrm>
-            <a:off x="6016752" y="3364992"/>
-            <a:ext cx="411480" cy="475488"/>
+          <p:cNvPr id="33" name="Text 31"/>
+          <p:cNvSpPr/>
+          <p:nvPr/>
+        </p:nvSpPr>
+        <p:spPr>
+          <a:xfrm>
+            <a:off x="5157216" y="3364992"/>
+            <a:ext cx="73152" cy="475488"/>
           </a:xfrm>
           <a:prstGeom prst="rect">
             <a:avLst/>
@@ -20931,14 +21089,14 @@
       </p:sp>
       <p:sp>
         <p:nvSpPr>
-          <p:cNvPr id="31" name="Shape 29"/>
-          <p:cNvSpPr/>
-          <p:nvPr/>
-        </p:nvSpPr>
-        <p:spPr>
-          <a:xfrm>
-            <a:off x="6428232" y="3364992"/>
-            <a:ext cx="1645920" cy="475488"/>
+          <p:cNvPr id="34" name="Shape 32"/>
+          <p:cNvSpPr/>
+          <p:nvPr/>
+        </p:nvSpPr>
+        <p:spPr>
+          <a:xfrm>
+            <a:off x="5230368" y="3364992"/>
+            <a:ext cx="1554480" cy="475488"/>
           </a:xfrm>
           <a:prstGeom prst="rect">
             <a:avLst>
@@ -20958,14 +21116,14 @@
       </p:sp>
       <p:sp>
         <p:nvSpPr>
-          <p:cNvPr id="32" name="Text 30"/>
-          <p:cNvSpPr/>
-          <p:nvPr/>
-        </p:nvSpPr>
-        <p:spPr>
-          <a:xfrm>
-            <a:off x="6428232" y="3364992"/>
-            <a:ext cx="1645920" cy="475488"/>
+          <p:cNvPr id="35" name="Text 33"/>
+          <p:cNvSpPr/>
+          <p:nvPr/>
+        </p:nvSpPr>
+        <p:spPr>
+          <a:xfrm>
+            <a:off x="5230368" y="3364992"/>
+            <a:ext cx="1554480" cy="475488"/>
           </a:xfrm>
           <a:prstGeom prst="rect">
             <a:avLst/>
@@ -20989,6 +21147,111 @@
                 <a:ea typeface="Trebuchet MS" pitchFamily="34" charset="-122"/>
                 <a:cs typeface="Trebuchet MS" pitchFamily="34" charset="-120"/>
               </a:rPr>
+              <a:t>trac</a:t>
+            </a:r>
+            <a:endParaRPr lang="en-US" sz="1400" dirty="0"/>
+          </a:p>
+        </p:txBody>
+      </p:sp>
+      <p:sp>
+        <p:nvSpPr>
+          <p:cNvPr id="36" name="Text 34"/>
+          <p:cNvSpPr/>
+          <p:nvPr/>
+        </p:nvSpPr>
+        <p:spPr>
+          <a:xfrm>
+            <a:off x="6784848" y="3364992"/>
+            <a:ext cx="73152" cy="475488"/>
+          </a:xfrm>
+          <a:prstGeom prst="rect">
+            <a:avLst/>
+          </a:prstGeom>
+          <a:noFill/>
+          <a:ln/>
+        </p:spPr>
+        <p:txBody>
+          <a:bodyPr wrap="square" lIns="0" tIns="0" rIns="0" bIns="0" rtlCol="0" anchor="ctr"/>
+          <a:lstStyle/>
+          <a:p>
+            <a:pPr algn="ctr" indent="0" marL="0">
+              <a:buNone/>
+            </a:pPr>
+            <a:r>
+              <a:rPr lang="en-US" sz="1600" b="1" dirty="0">
+                <a:solidFill>
+                  <a:srgbClr val="0D9488"/>
+                </a:solidFill>
+                <a:latin typeface="Trebuchet MS" pitchFamily="34" charset="0"/>
+                <a:ea typeface="Trebuchet MS" pitchFamily="34" charset="-122"/>
+                <a:cs typeface="Trebuchet MS" pitchFamily="34" charset="-120"/>
+              </a:rPr>
+              <a:t>·</a:t>
+            </a:r>
+            <a:endParaRPr lang="en-US" sz="1600" dirty="0"/>
+          </a:p>
+        </p:txBody>
+      </p:sp>
+      <p:sp>
+        <p:nvSpPr>
+          <p:cNvPr id="37" name="Shape 35"/>
+          <p:cNvSpPr/>
+          <p:nvPr/>
+        </p:nvSpPr>
+        <p:spPr>
+          <a:xfrm>
+            <a:off x="6858000" y="3364992"/>
+            <a:ext cx="1554480" cy="475488"/>
+          </a:xfrm>
+          <a:prstGeom prst="rect">
+            <a:avLst>
+              <a:gd name="adj" fmla="val 9615"/>
+            </a:avLst>
+          </a:prstGeom>
+          <a:solidFill>
+            <a:srgbClr val="FFFFFF"/>
+          </a:solidFill>
+          <a:ln w="12700">
+            <a:solidFill>
+              <a:srgbClr val="0D9488"/>
+            </a:solidFill>
+            <a:prstDash val="solid"/>
+          </a:ln>
+        </p:spPr>
+      </p:sp>
+      <p:sp>
+        <p:nvSpPr>
+          <p:cNvPr id="38" name="Text 36"/>
+          <p:cNvSpPr/>
+          <p:nvPr/>
+        </p:nvSpPr>
+        <p:spPr>
+          <a:xfrm>
+            <a:off x="6858000" y="3364992"/>
+            <a:ext cx="1554480" cy="475488"/>
+          </a:xfrm>
+          <a:prstGeom prst="rect">
+            <a:avLst/>
+          </a:prstGeom>
+          <a:noFill/>
+          <a:ln/>
+        </p:spPr>
+        <p:txBody>
+          <a:bodyPr wrap="square" lIns="0" tIns="0" rIns="0" bIns="0" rtlCol="0" anchor="ctr"/>
+          <a:lstStyle/>
+          <a:p>
+            <a:pPr algn="ctr" indent="0" marL="0">
+              <a:buNone/>
+            </a:pPr>
+            <a:r>
+              <a:rPr lang="en-US" sz="1400" b="1" dirty="0">
+                <a:solidFill>
+                  <a:srgbClr val="0D9488"/>
+                </a:solidFill>
+                <a:latin typeface="Trebuchet MS" pitchFamily="34" charset="0"/>
+                <a:ea typeface="Trebuchet MS" pitchFamily="34" charset="-122"/>
+                <a:cs typeface="Trebuchet MS" pitchFamily="34" charset="-120"/>
+              </a:rPr>
               <a:t>tive</a:t>
             </a:r>
             <a:endParaRPr lang="en-US" sz="1400" dirty="0"/>
@@ -20997,7 +21260,7 @@
       </p:sp>
       <p:sp>
         <p:nvSpPr>
-          <p:cNvPr id="33" name="Shape 31"/>
+          <p:cNvPr id="39" name="Shape 37"/>
           <p:cNvSpPr/>
           <p:nvPr/>
         </p:nvSpPr>
@@ -21024,7 +21287,7 @@
       </p:sp>
       <p:sp>
         <p:nvSpPr>
-          <p:cNvPr id="34" name="Text 32"/>
+          <p:cNvPr id="40" name="Text 38"/>
           <p:cNvSpPr/>
           <p:nvPr/>
         </p:nvSpPr>
@@ -21063,7 +21326,7 @@
       </p:sp>
       <p:sp>
         <p:nvSpPr>
-          <p:cNvPr id="35" name="Shape 33"/>
+          <p:cNvPr id="41" name="Shape 39"/>
           <p:cNvSpPr/>
           <p:nvPr/>
         </p:nvSpPr>
@@ -21090,7 +21353,7 @@
       </p:sp>
       <p:sp>
         <p:nvSpPr>
-          <p:cNvPr id="36" name="Text 34"/>
+          <p:cNvPr id="42" name="Text 40"/>
           <p:cNvSpPr/>
           <p:nvPr/>
         </p:nvSpPr>
@@ -21552,7 +21815,7 @@
                 <a:ea typeface="Trebuchet MS" pitchFamily="34" charset="-122"/>
                 <a:cs typeface="Trebuchet MS" pitchFamily="34" charset="-120"/>
               </a:rPr>
-              <a:t>attractive</a:t>
+              <a:t>unattractive</a:t>
             </a:r>
             <a:endParaRPr lang="en-US" sz="2800" dirty="0"/>
           </a:p>
@@ -21632,7 +21895,7 @@
         </p:nvSpPr>
         <p:spPr>
           <a:xfrm>
-            <a:off x="2938272" y="2258568"/>
+            <a:off x="2221992" y="2258568"/>
             <a:ext cx="1828800" cy="292608"/>
           </a:xfrm>
           <a:prstGeom prst="rect">
@@ -21641,11 +21904,11 @@
             </a:avLst>
           </a:prstGeom>
           <a:solidFill>
-            <a:srgbClr val="CCFBF1"/>
+            <a:srgbClr val="DDD6FE"/>
           </a:solidFill>
           <a:ln w="19050">
             <a:solidFill>
-              <a:srgbClr val="0D9488"/>
+              <a:srgbClr val="7C3AED"/>
             </a:solidFill>
             <a:prstDash val="solid"/>
           </a:ln>
@@ -21666,7 +21929,7 @@
         </p:nvSpPr>
         <p:spPr>
           <a:xfrm>
-            <a:off x="2938272" y="2258568"/>
+            <a:off x="2221992" y="2258568"/>
             <a:ext cx="1828800" cy="292608"/>
           </a:xfrm>
           <a:prstGeom prst="rect">
@@ -21685,13 +21948,13 @@
             <a:r>
               <a:rPr lang="en-US" sz="1300" b="1" dirty="0">
                 <a:solidFill>
-                  <a:srgbClr val="0F766E"/>
+                  <a:srgbClr val="4C1D95"/>
                 </a:solidFill>
                 <a:latin typeface="Trebuchet MS" pitchFamily="34" charset="0"/>
                 <a:ea typeface="Trebuchet MS" pitchFamily="34" charset="-122"/>
                 <a:cs typeface="Trebuchet MS" pitchFamily="34" charset="-120"/>
               </a:rPr>
-              <a:t>attract</a:t>
+              <a:t>un</a:t>
             </a:r>
             <a:endParaRPr lang="en-US" sz="1300" dirty="0"/>
           </a:p>
@@ -21705,7 +21968,7 @@
         </p:nvSpPr>
         <p:spPr>
           <a:xfrm>
-            <a:off x="2938272" y="2569464"/>
+            <a:off x="2221992" y="2569464"/>
             <a:ext cx="1828800" cy="201168"/>
           </a:xfrm>
           <a:prstGeom prst="rect">
@@ -21730,7 +21993,7 @@
                 <a:ea typeface="Calibri" pitchFamily="34" charset="-122"/>
                 <a:cs typeface="Calibri" pitchFamily="34" charset="-120"/>
               </a:rPr>
-              <a:t>to draw or pull toward</a:t>
+              <a:t>not</a:t>
             </a:r>
             <a:endParaRPr lang="en-US" sz="850" dirty="0"/>
           </a:p>
@@ -21744,7 +22007,7 @@
         </p:nvSpPr>
         <p:spPr>
           <a:xfrm>
-            <a:off x="5803392" y="2258568"/>
+            <a:off x="4370832" y="2258568"/>
             <a:ext cx="1828800" cy="292608"/>
           </a:xfrm>
           <a:prstGeom prst="rect">
@@ -21753,11 +22016,11 @@
             </a:avLst>
           </a:prstGeom>
           <a:solidFill>
-            <a:srgbClr val="FCE7F3"/>
+            <a:srgbClr val="CCFBF1"/>
           </a:solidFill>
           <a:ln w="19050">
             <a:solidFill>
-              <a:srgbClr val="DB2777"/>
+              <a:srgbClr val="0D9488"/>
             </a:solidFill>
             <a:prstDash val="solid"/>
           </a:ln>
@@ -21778,7 +22041,7 @@
         </p:nvSpPr>
         <p:spPr>
           <a:xfrm>
-            <a:off x="5803392" y="2258568"/>
+            <a:off x="4370832" y="2258568"/>
             <a:ext cx="1828800" cy="292608"/>
           </a:xfrm>
           <a:prstGeom prst="rect">
@@ -21797,13 +22060,13 @@
             <a:r>
               <a:rPr lang="en-US" sz="1300" b="1" dirty="0">
                 <a:solidFill>
-                  <a:srgbClr val="9D174D"/>
+                  <a:srgbClr val="0F766E"/>
                 </a:solidFill>
                 <a:latin typeface="Trebuchet MS" pitchFamily="34" charset="0"/>
                 <a:ea typeface="Trebuchet MS" pitchFamily="34" charset="-122"/>
                 <a:cs typeface="Trebuchet MS" pitchFamily="34" charset="-120"/>
               </a:rPr>
-              <a:t>ive</a:t>
+              <a:t>attract</a:t>
             </a:r>
             <a:endParaRPr lang="en-US" sz="1300" dirty="0"/>
           </a:p>
@@ -21817,7 +22080,7 @@
         </p:nvSpPr>
         <p:spPr>
           <a:xfrm>
-            <a:off x="5803392" y="2569464"/>
+            <a:off x="4370832" y="2569464"/>
             <a:ext cx="1828800" cy="201168"/>
           </a:xfrm>
           <a:prstGeom prst="rect">
@@ -21842,6 +22105,118 @@
                 <a:ea typeface="Calibri" pitchFamily="34" charset="-122"/>
                 <a:cs typeface="Calibri" pitchFamily="34" charset="-120"/>
               </a:rPr>
+              <a:t>to draw or pull toward</a:t>
+            </a:r>
+            <a:endParaRPr lang="en-US" sz="850" dirty="0"/>
+          </a:p>
+        </p:txBody>
+      </p:sp>
+      <p:sp>
+        <p:nvSpPr>
+          <p:cNvPr id="22" name="Shape 20"/>
+          <p:cNvSpPr/>
+          <p:nvPr/>
+        </p:nvSpPr>
+        <p:spPr>
+          <a:xfrm>
+            <a:off x="6519672" y="2258568"/>
+            <a:ext cx="1828800" cy="292608"/>
+          </a:xfrm>
+          <a:prstGeom prst="rect">
+            <a:avLst>
+              <a:gd name="adj" fmla="val 25000"/>
+            </a:avLst>
+          </a:prstGeom>
+          <a:solidFill>
+            <a:srgbClr val="FCE7F3"/>
+          </a:solidFill>
+          <a:ln w="19050">
+            <a:solidFill>
+              <a:srgbClr val="DB2777"/>
+            </a:solidFill>
+            <a:prstDash val="solid"/>
+          </a:ln>
+          <a:effectLst>
+            <a:outerShdw sx="100000" sy="100000" kx="0" ky="0" algn="bl" rotWithShape="0" blurRad="101600" dist="38100" dir="8100000">
+              <a:srgbClr val="000000">
+                <a:alpha val="12000"/>
+              </a:srgbClr>
+            </a:outerShdw>
+          </a:effectLst>
+        </p:spPr>
+      </p:sp>
+      <p:sp>
+        <p:nvSpPr>
+          <p:cNvPr id="23" name="Text 21"/>
+          <p:cNvSpPr/>
+          <p:nvPr/>
+        </p:nvSpPr>
+        <p:spPr>
+          <a:xfrm>
+            <a:off x="6519672" y="2258568"/>
+            <a:ext cx="1828800" cy="292608"/>
+          </a:xfrm>
+          <a:prstGeom prst="rect">
+            <a:avLst/>
+          </a:prstGeom>
+          <a:noFill/>
+          <a:ln/>
+        </p:spPr>
+        <p:txBody>
+          <a:bodyPr wrap="square" lIns="0" tIns="0" rIns="0" bIns="0" rtlCol="0" anchor="ctr"/>
+          <a:lstStyle/>
+          <a:p>
+            <a:pPr algn="ctr" indent="0" marL="0">
+              <a:buNone/>
+            </a:pPr>
+            <a:r>
+              <a:rPr lang="en-US" sz="1300" b="1" dirty="0">
+                <a:solidFill>
+                  <a:srgbClr val="9D174D"/>
+                </a:solidFill>
+                <a:latin typeface="Trebuchet MS" pitchFamily="34" charset="0"/>
+                <a:ea typeface="Trebuchet MS" pitchFamily="34" charset="-122"/>
+                <a:cs typeface="Trebuchet MS" pitchFamily="34" charset="-120"/>
+              </a:rPr>
+              <a:t>ive</a:t>
+            </a:r>
+            <a:endParaRPr lang="en-US" sz="1300" dirty="0"/>
+          </a:p>
+        </p:txBody>
+      </p:sp>
+      <p:sp>
+        <p:nvSpPr>
+          <p:cNvPr id="24" name="Text 22"/>
+          <p:cNvSpPr/>
+          <p:nvPr/>
+        </p:nvSpPr>
+        <p:spPr>
+          <a:xfrm>
+            <a:off x="6519672" y="2569464"/>
+            <a:ext cx="1828800" cy="201168"/>
+          </a:xfrm>
+          <a:prstGeom prst="rect">
+            <a:avLst/>
+          </a:prstGeom>
+          <a:noFill/>
+          <a:ln/>
+        </p:spPr>
+        <p:txBody>
+          <a:bodyPr wrap="square" lIns="0" tIns="0" rIns="0" bIns="0" rtlCol="0" anchor="t"/>
+          <a:lstStyle/>
+          <a:p>
+            <a:pPr algn="ctr" indent="0" marL="0">
+              <a:buNone/>
+            </a:pPr>
+            <a:r>
+              <a:rPr lang="en-US" sz="850" dirty="0">
+                <a:solidFill>
+                  <a:srgbClr val="475569"/>
+                </a:solidFill>
+                <a:latin typeface="Calibri" pitchFamily="34" charset="0"/>
+                <a:ea typeface="Calibri" pitchFamily="34" charset="-122"/>
+                <a:cs typeface="Calibri" pitchFamily="34" charset="-120"/>
+              </a:rPr>
               <a:t>having the quality of</a:t>
             </a:r>
             <a:endParaRPr lang="en-US" sz="850" dirty="0"/>
@@ -21850,7 +22225,7 @@
       </p:sp>
       <p:sp>
         <p:nvSpPr>
-          <p:cNvPr id="22" name="Shape 20"/>
+          <p:cNvPr id="25" name="Shape 23"/>
           <p:cNvSpPr/>
           <p:nvPr/>
         </p:nvSpPr>
@@ -21877,7 +22252,7 @@
       </p:sp>
       <p:sp>
         <p:nvSpPr>
-          <p:cNvPr id="23" name="Text 21"/>
+          <p:cNvPr id="26" name="Text 24"/>
           <p:cNvSpPr/>
           <p:nvPr/>
         </p:nvSpPr>
@@ -21916,7 +22291,7 @@
       </p:sp>
       <p:sp>
         <p:nvSpPr>
-          <p:cNvPr id="24" name="Shape 22"/>
+          <p:cNvPr id="27" name="Shape 25"/>
           <p:cNvSpPr/>
           <p:nvPr/>
         </p:nvSpPr>
@@ -21943,14 +22318,14 @@
       </p:sp>
       <p:sp>
         <p:nvSpPr>
-          <p:cNvPr id="25" name="Shape 23"/>
-          <p:cNvSpPr/>
-          <p:nvPr/>
-        </p:nvSpPr>
-        <p:spPr>
-          <a:xfrm>
-            <a:off x="2313432" y="3364992"/>
-            <a:ext cx="1645920" cy="475488"/>
+          <p:cNvPr id="28" name="Shape 26"/>
+          <p:cNvSpPr/>
+          <p:nvPr/>
+        </p:nvSpPr>
+        <p:spPr>
+          <a:xfrm>
+            <a:off x="1975104" y="3364992"/>
+            <a:ext cx="1554480" cy="475488"/>
           </a:xfrm>
           <a:prstGeom prst="rect">
             <a:avLst>
@@ -21970,14 +22345,14 @@
       </p:sp>
       <p:sp>
         <p:nvSpPr>
-          <p:cNvPr id="26" name="Text 24"/>
-          <p:cNvSpPr/>
-          <p:nvPr/>
-        </p:nvSpPr>
-        <p:spPr>
-          <a:xfrm>
-            <a:off x="2313432" y="3364992"/>
-            <a:ext cx="1645920" cy="475488"/>
+          <p:cNvPr id="29" name="Text 27"/>
+          <p:cNvSpPr/>
+          <p:nvPr/>
+        </p:nvSpPr>
+        <p:spPr>
+          <a:xfrm>
+            <a:off x="1975104" y="3364992"/>
+            <a:ext cx="1554480" cy="475488"/>
           </a:xfrm>
           <a:prstGeom prst="rect">
             <a:avLst/>
@@ -22001,7 +22376,7 @@
                 <a:ea typeface="Trebuchet MS" pitchFamily="34" charset="-122"/>
                 <a:cs typeface="Trebuchet MS" pitchFamily="34" charset="-120"/>
               </a:rPr>
-              <a:t>at</a:t>
+              <a:t>un</a:t>
             </a:r>
             <a:endParaRPr lang="en-US" sz="1400" dirty="0"/>
           </a:p>
@@ -22009,14 +22384,14 @@
       </p:sp>
       <p:sp>
         <p:nvSpPr>
-          <p:cNvPr id="27" name="Text 25"/>
-          <p:cNvSpPr/>
-          <p:nvPr/>
-        </p:nvSpPr>
-        <p:spPr>
-          <a:xfrm>
-            <a:off x="3959352" y="3364992"/>
-            <a:ext cx="411480" cy="475488"/>
+          <p:cNvPr id="30" name="Text 28"/>
+          <p:cNvSpPr/>
+          <p:nvPr/>
+        </p:nvSpPr>
+        <p:spPr>
+          <a:xfrm>
+            <a:off x="3529584" y="3364992"/>
+            <a:ext cx="73152" cy="475488"/>
           </a:xfrm>
           <a:prstGeom prst="rect">
             <a:avLst/>
@@ -22048,14 +22423,14 @@
       </p:sp>
       <p:sp>
         <p:nvSpPr>
-          <p:cNvPr id="28" name="Shape 26"/>
-          <p:cNvSpPr/>
-          <p:nvPr/>
-        </p:nvSpPr>
-        <p:spPr>
-          <a:xfrm>
-            <a:off x="4370832" y="3364992"/>
-            <a:ext cx="1645920" cy="475488"/>
+          <p:cNvPr id="31" name="Shape 29"/>
+          <p:cNvSpPr/>
+          <p:nvPr/>
+        </p:nvSpPr>
+        <p:spPr>
+          <a:xfrm>
+            <a:off x="3602736" y="3364992"/>
+            <a:ext cx="1554480" cy="475488"/>
           </a:xfrm>
           <a:prstGeom prst="rect">
             <a:avLst>
@@ -22075,14 +22450,14 @@
       </p:sp>
       <p:sp>
         <p:nvSpPr>
-          <p:cNvPr id="29" name="Text 27"/>
-          <p:cNvSpPr/>
-          <p:nvPr/>
-        </p:nvSpPr>
-        <p:spPr>
-          <a:xfrm>
-            <a:off x="4370832" y="3364992"/>
-            <a:ext cx="1645920" cy="475488"/>
+          <p:cNvPr id="32" name="Text 30"/>
+          <p:cNvSpPr/>
+          <p:nvPr/>
+        </p:nvSpPr>
+        <p:spPr>
+          <a:xfrm>
+            <a:off x="3602736" y="3364992"/>
+            <a:ext cx="1554480" cy="475488"/>
           </a:xfrm>
           <a:prstGeom prst="rect">
             <a:avLst/>
@@ -22106,7 +22481,7 @@
                 <a:ea typeface="Trebuchet MS" pitchFamily="34" charset="-122"/>
                 <a:cs typeface="Trebuchet MS" pitchFamily="34" charset="-120"/>
               </a:rPr>
-              <a:t>trac</a:t>
+              <a:t>at</a:t>
             </a:r>
             <a:endParaRPr lang="en-US" sz="1400" dirty="0"/>
           </a:p>
@@ -22114,14 +22489,14 @@
       </p:sp>
       <p:sp>
         <p:nvSpPr>
-          <p:cNvPr id="30" name="Text 28"/>
-          <p:cNvSpPr/>
-          <p:nvPr/>
-        </p:nvSpPr>
-        <p:spPr>
-          <a:xfrm>
-            <a:off x="6016752" y="3364992"/>
-            <a:ext cx="411480" cy="475488"/>
+          <p:cNvPr id="33" name="Text 31"/>
+          <p:cNvSpPr/>
+          <p:nvPr/>
+        </p:nvSpPr>
+        <p:spPr>
+          <a:xfrm>
+            <a:off x="5157216" y="3364992"/>
+            <a:ext cx="73152" cy="475488"/>
           </a:xfrm>
           <a:prstGeom prst="rect">
             <a:avLst/>
@@ -22153,14 +22528,14 @@
       </p:sp>
       <p:sp>
         <p:nvSpPr>
-          <p:cNvPr id="31" name="Shape 29"/>
-          <p:cNvSpPr/>
-          <p:nvPr/>
-        </p:nvSpPr>
-        <p:spPr>
-          <a:xfrm>
-            <a:off x="6428232" y="3364992"/>
-            <a:ext cx="1645920" cy="475488"/>
+          <p:cNvPr id="34" name="Shape 32"/>
+          <p:cNvSpPr/>
+          <p:nvPr/>
+        </p:nvSpPr>
+        <p:spPr>
+          <a:xfrm>
+            <a:off x="5230368" y="3364992"/>
+            <a:ext cx="1554480" cy="475488"/>
           </a:xfrm>
           <a:prstGeom prst="rect">
             <a:avLst>
@@ -22180,14 +22555,14 @@
       </p:sp>
       <p:sp>
         <p:nvSpPr>
-          <p:cNvPr id="32" name="Text 30"/>
-          <p:cNvSpPr/>
-          <p:nvPr/>
-        </p:nvSpPr>
-        <p:spPr>
-          <a:xfrm>
-            <a:off x="6428232" y="3364992"/>
-            <a:ext cx="1645920" cy="475488"/>
+          <p:cNvPr id="35" name="Text 33"/>
+          <p:cNvSpPr/>
+          <p:nvPr/>
+        </p:nvSpPr>
+        <p:spPr>
+          <a:xfrm>
+            <a:off x="5230368" y="3364992"/>
+            <a:ext cx="1554480" cy="475488"/>
           </a:xfrm>
           <a:prstGeom prst="rect">
             <a:avLst/>
@@ -22211,6 +22586,111 @@
                 <a:ea typeface="Trebuchet MS" pitchFamily="34" charset="-122"/>
                 <a:cs typeface="Trebuchet MS" pitchFamily="34" charset="-120"/>
               </a:rPr>
+              <a:t>trac</a:t>
+            </a:r>
+            <a:endParaRPr lang="en-US" sz="1400" dirty="0"/>
+          </a:p>
+        </p:txBody>
+      </p:sp>
+      <p:sp>
+        <p:nvSpPr>
+          <p:cNvPr id="36" name="Text 34"/>
+          <p:cNvSpPr/>
+          <p:nvPr/>
+        </p:nvSpPr>
+        <p:spPr>
+          <a:xfrm>
+            <a:off x="6784848" y="3364992"/>
+            <a:ext cx="73152" cy="475488"/>
+          </a:xfrm>
+          <a:prstGeom prst="rect">
+            <a:avLst/>
+          </a:prstGeom>
+          <a:noFill/>
+          <a:ln/>
+        </p:spPr>
+        <p:txBody>
+          <a:bodyPr wrap="square" lIns="0" tIns="0" rIns="0" bIns="0" rtlCol="0" anchor="ctr"/>
+          <a:lstStyle/>
+          <a:p>
+            <a:pPr algn="ctr" indent="0" marL="0">
+              <a:buNone/>
+            </a:pPr>
+            <a:r>
+              <a:rPr lang="en-US" sz="1600" b="1" dirty="0">
+                <a:solidFill>
+                  <a:srgbClr val="0D9488"/>
+                </a:solidFill>
+                <a:latin typeface="Trebuchet MS" pitchFamily="34" charset="0"/>
+                <a:ea typeface="Trebuchet MS" pitchFamily="34" charset="-122"/>
+                <a:cs typeface="Trebuchet MS" pitchFamily="34" charset="-120"/>
+              </a:rPr>
+              <a:t>·</a:t>
+            </a:r>
+            <a:endParaRPr lang="en-US" sz="1600" dirty="0"/>
+          </a:p>
+        </p:txBody>
+      </p:sp>
+      <p:sp>
+        <p:nvSpPr>
+          <p:cNvPr id="37" name="Shape 35"/>
+          <p:cNvSpPr/>
+          <p:nvPr/>
+        </p:nvSpPr>
+        <p:spPr>
+          <a:xfrm>
+            <a:off x="6858000" y="3364992"/>
+            <a:ext cx="1554480" cy="475488"/>
+          </a:xfrm>
+          <a:prstGeom prst="rect">
+            <a:avLst>
+              <a:gd name="adj" fmla="val 9615"/>
+            </a:avLst>
+          </a:prstGeom>
+          <a:solidFill>
+            <a:srgbClr val="FFFFFF"/>
+          </a:solidFill>
+          <a:ln w="12700">
+            <a:solidFill>
+              <a:srgbClr val="0D9488"/>
+            </a:solidFill>
+            <a:prstDash val="solid"/>
+          </a:ln>
+        </p:spPr>
+      </p:sp>
+      <p:sp>
+        <p:nvSpPr>
+          <p:cNvPr id="38" name="Text 36"/>
+          <p:cNvSpPr/>
+          <p:nvPr/>
+        </p:nvSpPr>
+        <p:spPr>
+          <a:xfrm>
+            <a:off x="6858000" y="3364992"/>
+            <a:ext cx="1554480" cy="475488"/>
+          </a:xfrm>
+          <a:prstGeom prst="rect">
+            <a:avLst/>
+          </a:prstGeom>
+          <a:noFill/>
+          <a:ln/>
+        </p:spPr>
+        <p:txBody>
+          <a:bodyPr wrap="square" lIns="0" tIns="0" rIns="0" bIns="0" rtlCol="0" anchor="ctr"/>
+          <a:lstStyle/>
+          <a:p>
+            <a:pPr algn="ctr" indent="0" marL="0">
+              <a:buNone/>
+            </a:pPr>
+            <a:r>
+              <a:rPr lang="en-US" sz="1400" b="1" dirty="0">
+                <a:solidFill>
+                  <a:srgbClr val="0D9488"/>
+                </a:solidFill>
+                <a:latin typeface="Trebuchet MS" pitchFamily="34" charset="0"/>
+                <a:ea typeface="Trebuchet MS" pitchFamily="34" charset="-122"/>
+                <a:cs typeface="Trebuchet MS" pitchFamily="34" charset="-120"/>
+              </a:rPr>
               <a:t>tive</a:t>
             </a:r>
             <a:endParaRPr lang="en-US" sz="1400" dirty="0"/>
@@ -22219,7 +22699,7 @@
       </p:sp>
       <p:sp>
         <p:nvSpPr>
-          <p:cNvPr id="33" name="Shape 31"/>
+          <p:cNvPr id="39" name="Shape 37"/>
           <p:cNvSpPr/>
           <p:nvPr/>
         </p:nvSpPr>
@@ -22246,7 +22726,7 @@
       </p:sp>
       <p:sp>
         <p:nvSpPr>
-          <p:cNvPr id="34" name="Text 32"/>
+          <p:cNvPr id="40" name="Text 38"/>
           <p:cNvSpPr/>
           <p:nvPr/>
         </p:nvSpPr>
@@ -22285,18 +22765,18 @@
       </p:sp>
       <p:sp>
         <p:nvSpPr>
-          <p:cNvPr id="35" name="Shape 33"/>
+          <p:cNvPr id="41" name="Shape 39"/>
           <p:cNvSpPr/>
           <p:nvPr/>
         </p:nvSpPr>
         <p:spPr>
           <a:xfrm>
             <a:off x="1874520" y="4096512"/>
-            <a:ext cx="6903720" cy="804672"/>
+            <a:ext cx="6903720" cy="658368"/>
           </a:xfrm>
           <a:prstGeom prst="rect">
             <a:avLst>
-              <a:gd name="adj" fmla="val 6818"/>
+              <a:gd name="adj" fmla="val 8333"/>
             </a:avLst>
           </a:prstGeom>
           <a:solidFill>
@@ -22312,18 +22792,18 @@
       </p:sp>
       <p:sp>
         <p:nvSpPr>
-          <p:cNvPr id="36" name="Shape 34"/>
-          <p:cNvSpPr/>
-          <p:nvPr/>
-        </p:nvSpPr>
-        <p:spPr>
-          <a:xfrm>
-            <a:off x="2023872" y="4169664"/>
-            <a:ext cx="685800" cy="384048"/>
+          <p:cNvPr id="42" name="Shape 40"/>
+          <p:cNvSpPr/>
+          <p:nvPr/>
+        </p:nvSpPr>
+        <p:spPr>
+          <a:xfrm>
+            <a:off x="1951828" y="4169664"/>
+            <a:ext cx="603504" cy="475488"/>
           </a:xfrm>
           <a:prstGeom prst="rect">
             <a:avLst>
-              <a:gd name="adj" fmla="val 9524"/>
+              <a:gd name="adj" fmla="val 7692"/>
             </a:avLst>
           </a:prstGeom>
           <a:solidFill>
@@ -22339,14 +22819,14 @@
       </p:sp>
       <p:sp>
         <p:nvSpPr>
-          <p:cNvPr id="37" name="Text 35"/>
-          <p:cNvSpPr/>
-          <p:nvPr/>
-        </p:nvSpPr>
-        <p:spPr>
-          <a:xfrm>
-            <a:off x="2023872" y="4169664"/>
-            <a:ext cx="685800" cy="384048"/>
+          <p:cNvPr id="43" name="Text 41"/>
+          <p:cNvSpPr/>
+          <p:nvPr/>
+        </p:nvSpPr>
+        <p:spPr>
+          <a:xfrm>
+            <a:off x="1951828" y="4169664"/>
+            <a:ext cx="603504" cy="475488"/>
           </a:xfrm>
           <a:prstGeom prst="rect">
             <a:avLst/>
@@ -22370,7 +22850,7 @@
                 <a:ea typeface="Trebuchet MS" pitchFamily="34" charset="-122"/>
                 <a:cs typeface="Trebuchet MS" pitchFamily="34" charset="-120"/>
               </a:rPr>
-              <a:t>a</a:t>
+              <a:t>u</a:t>
             </a:r>
             <a:endParaRPr lang="en-US" sz="900" dirty="0"/>
           </a:p>
@@ -22378,18 +22858,18 @@
       </p:sp>
       <p:sp>
         <p:nvSpPr>
-          <p:cNvPr id="38" name="Shape 36"/>
-          <p:cNvSpPr/>
-          <p:nvPr/>
-        </p:nvSpPr>
-        <p:spPr>
-          <a:xfrm>
-            <a:off x="2831592" y="4169664"/>
-            <a:ext cx="685800" cy="384048"/>
+          <p:cNvPr id="44" name="Shape 42"/>
+          <p:cNvSpPr/>
+          <p:nvPr/>
+        </p:nvSpPr>
+        <p:spPr>
+          <a:xfrm>
+            <a:off x="2605209" y="4169664"/>
+            <a:ext cx="603504" cy="475488"/>
           </a:xfrm>
           <a:prstGeom prst="rect">
             <a:avLst>
-              <a:gd name="adj" fmla="val 9524"/>
+              <a:gd name="adj" fmla="val 7692"/>
             </a:avLst>
           </a:prstGeom>
           <a:solidFill>
@@ -22405,14 +22885,14 @@
       </p:sp>
       <p:sp>
         <p:nvSpPr>
-          <p:cNvPr id="39" name="Text 37"/>
-          <p:cNvSpPr/>
-          <p:nvPr/>
-        </p:nvSpPr>
-        <p:spPr>
-          <a:xfrm>
-            <a:off x="2831592" y="4169664"/>
-            <a:ext cx="685800" cy="384048"/>
+          <p:cNvPr id="45" name="Text 43"/>
+          <p:cNvSpPr/>
+          <p:nvPr/>
+        </p:nvSpPr>
+        <p:spPr>
+          <a:xfrm>
+            <a:off x="2605209" y="4169664"/>
+            <a:ext cx="603504" cy="475488"/>
           </a:xfrm>
           <a:prstGeom prst="rect">
             <a:avLst/>
@@ -22436,7 +22916,7 @@
                 <a:ea typeface="Trebuchet MS" pitchFamily="34" charset="-122"/>
                 <a:cs typeface="Trebuchet MS" pitchFamily="34" charset="-120"/>
               </a:rPr>
-              <a:t>tt</a:t>
+              <a:t>n</a:t>
             </a:r>
             <a:endParaRPr lang="en-US" sz="900" dirty="0"/>
           </a:p>
@@ -22444,18 +22924,18 @@
       </p:sp>
       <p:sp>
         <p:nvSpPr>
-          <p:cNvPr id="40" name="Shape 38"/>
-          <p:cNvSpPr/>
-          <p:nvPr/>
-        </p:nvSpPr>
-        <p:spPr>
-          <a:xfrm>
-            <a:off x="3639312" y="4169664"/>
-            <a:ext cx="685800" cy="384048"/>
+          <p:cNvPr id="46" name="Shape 44"/>
+          <p:cNvSpPr/>
+          <p:nvPr/>
+        </p:nvSpPr>
+        <p:spPr>
+          <a:xfrm>
+            <a:off x="3258589" y="4169664"/>
+            <a:ext cx="603504" cy="475488"/>
           </a:xfrm>
           <a:prstGeom prst="rect">
             <a:avLst>
-              <a:gd name="adj" fmla="val 9524"/>
+              <a:gd name="adj" fmla="val 7692"/>
             </a:avLst>
           </a:prstGeom>
           <a:solidFill>
@@ -22471,14 +22951,14 @@
       </p:sp>
       <p:sp>
         <p:nvSpPr>
-          <p:cNvPr id="41" name="Text 39"/>
-          <p:cNvSpPr/>
-          <p:nvPr/>
-        </p:nvSpPr>
-        <p:spPr>
-          <a:xfrm>
-            <a:off x="3639312" y="4169664"/>
-            <a:ext cx="685800" cy="384048"/>
+          <p:cNvPr id="47" name="Text 45"/>
+          <p:cNvSpPr/>
+          <p:nvPr/>
+        </p:nvSpPr>
+        <p:spPr>
+          <a:xfrm>
+            <a:off x="3258589" y="4169664"/>
+            <a:ext cx="603504" cy="475488"/>
           </a:xfrm>
           <a:prstGeom prst="rect">
             <a:avLst/>
@@ -22502,7 +22982,7 @@
                 <a:ea typeface="Trebuchet MS" pitchFamily="34" charset="-122"/>
                 <a:cs typeface="Trebuchet MS" pitchFamily="34" charset="-120"/>
               </a:rPr>
-              <a:t>r</a:t>
+              <a:t>a</a:t>
             </a:r>
             <a:endParaRPr lang="en-US" sz="900" dirty="0"/>
           </a:p>
@@ -22510,18 +22990,18 @@
       </p:sp>
       <p:sp>
         <p:nvSpPr>
-          <p:cNvPr id="42" name="Shape 40"/>
-          <p:cNvSpPr/>
-          <p:nvPr/>
-        </p:nvSpPr>
-        <p:spPr>
-          <a:xfrm>
-            <a:off x="4447032" y="4169664"/>
-            <a:ext cx="685800" cy="384048"/>
+          <p:cNvPr id="48" name="Shape 46"/>
+          <p:cNvSpPr/>
+          <p:nvPr/>
+        </p:nvSpPr>
+        <p:spPr>
+          <a:xfrm>
+            <a:off x="3911969" y="4169664"/>
+            <a:ext cx="603504" cy="475488"/>
           </a:xfrm>
           <a:prstGeom prst="rect">
             <a:avLst>
-              <a:gd name="adj" fmla="val 9524"/>
+              <a:gd name="adj" fmla="val 7692"/>
             </a:avLst>
           </a:prstGeom>
           <a:solidFill>
@@ -22537,14 +23017,14 @@
       </p:sp>
       <p:sp>
         <p:nvSpPr>
-          <p:cNvPr id="43" name="Text 41"/>
-          <p:cNvSpPr/>
-          <p:nvPr/>
-        </p:nvSpPr>
-        <p:spPr>
-          <a:xfrm>
-            <a:off x="4447032" y="4169664"/>
-            <a:ext cx="685800" cy="384048"/>
+          <p:cNvPr id="49" name="Text 47"/>
+          <p:cNvSpPr/>
+          <p:nvPr/>
+        </p:nvSpPr>
+        <p:spPr>
+          <a:xfrm>
+            <a:off x="3911969" y="4169664"/>
+            <a:ext cx="603504" cy="475488"/>
           </a:xfrm>
           <a:prstGeom prst="rect">
             <a:avLst/>
@@ -22568,7 +23048,7 @@
                 <a:ea typeface="Trebuchet MS" pitchFamily="34" charset="-122"/>
                 <a:cs typeface="Trebuchet MS" pitchFamily="34" charset="-120"/>
               </a:rPr>
-              <a:t>a</a:t>
+              <a:t>tt</a:t>
             </a:r>
             <a:endParaRPr lang="en-US" sz="900" dirty="0"/>
           </a:p>
@@ -22576,18 +23056,18 @@
       </p:sp>
       <p:sp>
         <p:nvSpPr>
-          <p:cNvPr id="44" name="Shape 42"/>
-          <p:cNvSpPr/>
-          <p:nvPr/>
-        </p:nvSpPr>
-        <p:spPr>
-          <a:xfrm>
-            <a:off x="5254752" y="4169664"/>
-            <a:ext cx="685800" cy="384048"/>
+          <p:cNvPr id="50" name="Shape 48"/>
+          <p:cNvSpPr/>
+          <p:nvPr/>
+        </p:nvSpPr>
+        <p:spPr>
+          <a:xfrm>
+            <a:off x="4565350" y="4169664"/>
+            <a:ext cx="603504" cy="475488"/>
           </a:xfrm>
           <a:prstGeom prst="rect">
             <a:avLst>
-              <a:gd name="adj" fmla="val 9524"/>
+              <a:gd name="adj" fmla="val 7692"/>
             </a:avLst>
           </a:prstGeom>
           <a:solidFill>
@@ -22603,14 +23083,14 @@
       </p:sp>
       <p:sp>
         <p:nvSpPr>
-          <p:cNvPr id="45" name="Text 43"/>
-          <p:cNvSpPr/>
-          <p:nvPr/>
-        </p:nvSpPr>
-        <p:spPr>
-          <a:xfrm>
-            <a:off x="5254752" y="4169664"/>
-            <a:ext cx="685800" cy="384048"/>
+          <p:cNvPr id="51" name="Text 49"/>
+          <p:cNvSpPr/>
+          <p:nvPr/>
+        </p:nvSpPr>
+        <p:spPr>
+          <a:xfrm>
+            <a:off x="4565350" y="4169664"/>
+            <a:ext cx="603504" cy="475488"/>
           </a:xfrm>
           <a:prstGeom prst="rect">
             <a:avLst/>
@@ -22634,7 +23114,7 @@
                 <a:ea typeface="Trebuchet MS" pitchFamily="34" charset="-122"/>
                 <a:cs typeface="Trebuchet MS" pitchFamily="34" charset="-120"/>
               </a:rPr>
-              <a:t>c</a:t>
+              <a:t>r</a:t>
             </a:r>
             <a:endParaRPr lang="en-US" sz="900" dirty="0"/>
           </a:p>
@@ -22642,18 +23122,18 @@
       </p:sp>
       <p:sp>
         <p:nvSpPr>
-          <p:cNvPr id="46" name="Shape 44"/>
-          <p:cNvSpPr/>
-          <p:nvPr/>
-        </p:nvSpPr>
-        <p:spPr>
-          <a:xfrm>
-            <a:off x="6062472" y="4169664"/>
-            <a:ext cx="685800" cy="384048"/>
+          <p:cNvPr id="52" name="Shape 50"/>
+          <p:cNvSpPr/>
+          <p:nvPr/>
+        </p:nvSpPr>
+        <p:spPr>
+          <a:xfrm>
+            <a:off x="5218730" y="4169664"/>
+            <a:ext cx="603504" cy="475488"/>
           </a:xfrm>
           <a:prstGeom prst="rect">
             <a:avLst>
-              <a:gd name="adj" fmla="val 9524"/>
+              <a:gd name="adj" fmla="val 7692"/>
             </a:avLst>
           </a:prstGeom>
           <a:solidFill>
@@ -22669,14 +23149,14 @@
       </p:sp>
       <p:sp>
         <p:nvSpPr>
-          <p:cNvPr id="47" name="Text 45"/>
-          <p:cNvSpPr/>
-          <p:nvPr/>
-        </p:nvSpPr>
-        <p:spPr>
-          <a:xfrm>
-            <a:off x="6062472" y="4169664"/>
-            <a:ext cx="685800" cy="384048"/>
+          <p:cNvPr id="53" name="Text 51"/>
+          <p:cNvSpPr/>
+          <p:nvPr/>
+        </p:nvSpPr>
+        <p:spPr>
+          <a:xfrm>
+            <a:off x="5218730" y="4169664"/>
+            <a:ext cx="603504" cy="475488"/>
           </a:xfrm>
           <a:prstGeom prst="rect">
             <a:avLst/>
@@ -22700,7 +23180,7 @@
                 <a:ea typeface="Trebuchet MS" pitchFamily="34" charset="-122"/>
                 <a:cs typeface="Trebuchet MS" pitchFamily="34" charset="-120"/>
               </a:rPr>
-              <a:t>t</a:t>
+              <a:t>a</a:t>
             </a:r>
             <a:endParaRPr lang="en-US" sz="900" dirty="0"/>
           </a:p>
@@ -22708,18 +23188,18 @@
       </p:sp>
       <p:sp>
         <p:nvSpPr>
-          <p:cNvPr id="48" name="Shape 46"/>
-          <p:cNvSpPr/>
-          <p:nvPr/>
-        </p:nvSpPr>
-        <p:spPr>
-          <a:xfrm>
-            <a:off x="6870192" y="4169664"/>
-            <a:ext cx="685800" cy="384048"/>
+          <p:cNvPr id="54" name="Shape 52"/>
+          <p:cNvSpPr/>
+          <p:nvPr/>
+        </p:nvSpPr>
+        <p:spPr>
+          <a:xfrm>
+            <a:off x="5872111" y="4169664"/>
+            <a:ext cx="603504" cy="475488"/>
           </a:xfrm>
           <a:prstGeom prst="rect">
             <a:avLst>
-              <a:gd name="adj" fmla="val 9524"/>
+              <a:gd name="adj" fmla="val 7692"/>
             </a:avLst>
           </a:prstGeom>
           <a:solidFill>
@@ -22735,14 +23215,14 @@
       </p:sp>
       <p:sp>
         <p:nvSpPr>
-          <p:cNvPr id="49" name="Text 47"/>
-          <p:cNvSpPr/>
-          <p:nvPr/>
-        </p:nvSpPr>
-        <p:spPr>
-          <a:xfrm>
-            <a:off x="6870192" y="4169664"/>
-            <a:ext cx="685800" cy="384048"/>
+          <p:cNvPr id="55" name="Text 53"/>
+          <p:cNvSpPr/>
+          <p:nvPr/>
+        </p:nvSpPr>
+        <p:spPr>
+          <a:xfrm>
+            <a:off x="5872111" y="4169664"/>
+            <a:ext cx="603504" cy="475488"/>
           </a:xfrm>
           <a:prstGeom prst="rect">
             <a:avLst/>
@@ -22766,7 +23246,7 @@
                 <a:ea typeface="Trebuchet MS" pitchFamily="34" charset="-122"/>
                 <a:cs typeface="Trebuchet MS" pitchFamily="34" charset="-120"/>
               </a:rPr>
-              <a:t>i</a:t>
+              <a:t>c</a:t>
             </a:r>
             <a:endParaRPr lang="en-US" sz="900" dirty="0"/>
           </a:p>
@@ -22774,18 +23254,18 @@
       </p:sp>
       <p:sp>
         <p:nvSpPr>
-          <p:cNvPr id="50" name="Shape 48"/>
-          <p:cNvSpPr/>
-          <p:nvPr/>
-        </p:nvSpPr>
-        <p:spPr>
-          <a:xfrm>
-            <a:off x="7677912" y="4169664"/>
-            <a:ext cx="685800" cy="384048"/>
+          <p:cNvPr id="56" name="Shape 54"/>
+          <p:cNvSpPr/>
+          <p:nvPr/>
+        </p:nvSpPr>
+        <p:spPr>
+          <a:xfrm>
+            <a:off x="6525491" y="4169664"/>
+            <a:ext cx="603504" cy="475488"/>
           </a:xfrm>
           <a:prstGeom prst="rect">
             <a:avLst>
-              <a:gd name="adj" fmla="val 9524"/>
+              <a:gd name="adj" fmla="val 7692"/>
             </a:avLst>
           </a:prstGeom>
           <a:solidFill>
@@ -22801,14 +23281,14 @@
       </p:sp>
       <p:sp>
         <p:nvSpPr>
-          <p:cNvPr id="51" name="Text 49"/>
-          <p:cNvSpPr/>
-          <p:nvPr/>
-        </p:nvSpPr>
-        <p:spPr>
-          <a:xfrm>
-            <a:off x="7677912" y="4169664"/>
-            <a:ext cx="685800" cy="384048"/>
+          <p:cNvPr id="57" name="Text 55"/>
+          <p:cNvSpPr/>
+          <p:nvPr/>
+        </p:nvSpPr>
+        <p:spPr>
+          <a:xfrm>
+            <a:off x="6525491" y="4169664"/>
+            <a:ext cx="603504" cy="475488"/>
           </a:xfrm>
           <a:prstGeom prst="rect">
             <a:avLst/>
@@ -22832,48 +23312,141 @@
                 <a:ea typeface="Trebuchet MS" pitchFamily="34" charset="-122"/>
                 <a:cs typeface="Trebuchet MS" pitchFamily="34" charset="-120"/>
               </a:rPr>
+              <a:t>t</a:t>
+            </a:r>
+            <a:endParaRPr lang="en-US" sz="900" dirty="0"/>
+          </a:p>
+        </p:txBody>
+      </p:sp>
+      <p:sp>
+        <p:nvSpPr>
+          <p:cNvPr id="58" name="Shape 56"/>
+          <p:cNvSpPr/>
+          <p:nvPr/>
+        </p:nvSpPr>
+        <p:spPr>
+          <a:xfrm>
+            <a:off x="7178871" y="4169664"/>
+            <a:ext cx="603504" cy="475488"/>
+          </a:xfrm>
+          <a:prstGeom prst="rect">
+            <a:avLst>
+              <a:gd name="adj" fmla="val 7692"/>
+            </a:avLst>
+          </a:prstGeom>
+          <a:solidFill>
+            <a:srgbClr val="FFFFFF"/>
+          </a:solidFill>
+          <a:ln w="12700">
+            <a:solidFill>
+              <a:srgbClr val="DB2777"/>
+            </a:solidFill>
+            <a:prstDash val="solid"/>
+          </a:ln>
+        </p:spPr>
+      </p:sp>
+      <p:sp>
+        <p:nvSpPr>
+          <p:cNvPr id="59" name="Text 57"/>
+          <p:cNvSpPr/>
+          <p:nvPr/>
+        </p:nvSpPr>
+        <p:spPr>
+          <a:xfrm>
+            <a:off x="7178871" y="4169664"/>
+            <a:ext cx="603504" cy="475488"/>
+          </a:xfrm>
+          <a:prstGeom prst="rect">
+            <a:avLst/>
+          </a:prstGeom>
+          <a:noFill/>
+          <a:ln/>
+        </p:spPr>
+        <p:txBody>
+          <a:bodyPr wrap="square" lIns="0" tIns="0" rIns="0" bIns="0" rtlCol="0" anchor="ctr"/>
+          <a:lstStyle/>
+          <a:p>
+            <a:pPr algn="ctr" indent="0" marL="0">
+              <a:buNone/>
+            </a:pPr>
+            <a:r>
+              <a:rPr lang="en-US" sz="900" b="1" dirty="0">
+                <a:solidFill>
+                  <a:srgbClr val="9D174D"/>
+                </a:solidFill>
+                <a:latin typeface="Trebuchet MS" pitchFamily="34" charset="0"/>
+                <a:ea typeface="Trebuchet MS" pitchFamily="34" charset="-122"/>
+                <a:cs typeface="Trebuchet MS" pitchFamily="34" charset="-120"/>
+              </a:rPr>
+              <a:t>i</a:t>
+            </a:r>
+            <a:endParaRPr lang="en-US" sz="900" dirty="0"/>
+          </a:p>
+        </p:txBody>
+      </p:sp>
+      <p:sp>
+        <p:nvSpPr>
+          <p:cNvPr id="60" name="Shape 58"/>
+          <p:cNvSpPr/>
+          <p:nvPr/>
+        </p:nvSpPr>
+        <p:spPr>
+          <a:xfrm>
+            <a:off x="7832252" y="4169664"/>
+            <a:ext cx="603504" cy="475488"/>
+          </a:xfrm>
+          <a:prstGeom prst="rect">
+            <a:avLst>
+              <a:gd name="adj" fmla="val 7692"/>
+            </a:avLst>
+          </a:prstGeom>
+          <a:solidFill>
+            <a:srgbClr val="FFFFFF"/>
+          </a:solidFill>
+          <a:ln w="12700">
+            <a:solidFill>
+              <a:srgbClr val="DB2777"/>
+            </a:solidFill>
+            <a:prstDash val="solid"/>
+          </a:ln>
+        </p:spPr>
+      </p:sp>
+      <p:sp>
+        <p:nvSpPr>
+          <p:cNvPr id="61" name="Text 59"/>
+          <p:cNvSpPr/>
+          <p:nvPr/>
+        </p:nvSpPr>
+        <p:spPr>
+          <a:xfrm>
+            <a:off x="7832252" y="4169664"/>
+            <a:ext cx="603504" cy="475488"/>
+          </a:xfrm>
+          <a:prstGeom prst="rect">
+            <a:avLst/>
+          </a:prstGeom>
+          <a:noFill/>
+          <a:ln/>
+        </p:spPr>
+        <p:txBody>
+          <a:bodyPr wrap="square" lIns="0" tIns="0" rIns="0" bIns="0" rtlCol="0" anchor="ctr"/>
+          <a:lstStyle/>
+          <a:p>
+            <a:pPr algn="ctr" indent="0" marL="0">
+              <a:buNone/>
+            </a:pPr>
+            <a:r>
+              <a:rPr lang="en-US" sz="900" b="1" dirty="0">
+                <a:solidFill>
+                  <a:srgbClr val="9D174D"/>
+                </a:solidFill>
+                <a:latin typeface="Trebuchet MS" pitchFamily="34" charset="0"/>
+                <a:ea typeface="Trebuchet MS" pitchFamily="34" charset="-122"/>
+                <a:cs typeface="Trebuchet MS" pitchFamily="34" charset="-120"/>
+              </a:rPr>
               <a:t>ve</a:t>
             </a:r>
             <a:endParaRPr lang="en-US" sz="900" dirty="0"/>
-          </a:p>
-        </p:txBody>
-      </p:sp>
-      <p:sp>
-        <p:nvSpPr>
-          <p:cNvPr id="52" name="Text 50"/>
-          <p:cNvSpPr/>
-          <p:nvPr/>
-        </p:nvSpPr>
-        <p:spPr>
-          <a:xfrm>
-            <a:off x="7677912" y="4572000"/>
-            <a:ext cx="685800" cy="219456"/>
-          </a:xfrm>
-          <a:prstGeom prst="rect">
-            <a:avLst/>
-          </a:prstGeom>
-          <a:noFill/>
-          <a:ln/>
-        </p:spPr>
-        <p:txBody>
-          <a:bodyPr wrap="square" lIns="0" tIns="0" rIns="0" bIns="0" rtlCol="0" anchor="t"/>
-          <a:lstStyle/>
-          <a:p>
-            <a:pPr algn="ctr" indent="0" marL="0">
-              <a:buNone/>
-            </a:pPr>
-            <a:r>
-              <a:rPr lang="en-US" sz="750" i="1" dirty="0">
-                <a:solidFill>
-                  <a:srgbClr val="94A3B8"/>
-                </a:solidFill>
-                <a:latin typeface="Calibri" pitchFamily="34" charset="0"/>
-                <a:ea typeface="Calibri" pitchFamily="34" charset="-122"/>
-                <a:cs typeface="Calibri" pitchFamily="34" charset="-120"/>
-              </a:rPr>
-              <a:t>/v/</a:t>
-            </a:r>
-            <a:endParaRPr lang="en-US" sz="750" dirty="0"/>
           </a:p>
         </p:txBody>
       </p:sp>
@@ -23302,7 +23875,7 @@
                 <a:ea typeface="Trebuchet MS" pitchFamily="34" charset="-122"/>
                 <a:cs typeface="Trebuchet MS" pitchFamily="34" charset="-120"/>
               </a:rPr>
-              <a:t>attracting</a:t>
+              <a:t>attractive</a:t>
             </a:r>
             <a:endParaRPr lang="en-US" sz="2800" dirty="0"/>
           </a:p>
@@ -24129,7 +24702,7 @@
                 <a:ea typeface="Trebuchet MS" pitchFamily="34" charset="-122"/>
                 <a:cs typeface="Trebuchet MS" pitchFamily="34" charset="-120"/>
               </a:rPr>
-              <a:t>attracting</a:t>
+              <a:t>attractive</a:t>
             </a:r>
             <a:endParaRPr lang="en-US" sz="2800" dirty="0"/>
           </a:p>
@@ -24380,7 +24953,7 @@
                 <a:ea typeface="Trebuchet MS" pitchFamily="34" charset="-122"/>
                 <a:cs typeface="Trebuchet MS" pitchFamily="34" charset="-120"/>
               </a:rPr>
-              <a:t>ing</a:t>
+              <a:t>ive</a:t>
             </a:r>
             <a:endParaRPr lang="en-US" sz="1300" dirty="0"/>
           </a:p>
@@ -24419,7 +24992,7 @@
                 <a:ea typeface="Calibri" pitchFamily="34" charset="-122"/>
                 <a:cs typeface="Calibri" pitchFamily="34" charset="-120"/>
               </a:rPr>
-              <a:t>action happening now</a:t>
+              <a:t>having the quality of</a:t>
             </a:r>
             <a:endParaRPr lang="en-US" sz="850" dirty="0"/>
           </a:p>
@@ -25833,7 +26406,7 @@
                 <a:ea typeface="Trebuchet MS" pitchFamily="34" charset="-122"/>
                 <a:cs typeface="Trebuchet MS" pitchFamily="34" charset="-120"/>
               </a:rPr>
-              <a:t>attracting</a:t>
+              <a:t>attractive</a:t>
             </a:r>
             <a:endParaRPr lang="en-US" sz="2800" dirty="0"/>
           </a:p>
@@ -26084,7 +26657,7 @@
                 <a:ea typeface="Trebuchet MS" pitchFamily="34" charset="-122"/>
                 <a:cs typeface="Trebuchet MS" pitchFamily="34" charset="-120"/>
               </a:rPr>
-              <a:t>ing</a:t>
+              <a:t>ive</a:t>
             </a:r>
             <a:endParaRPr lang="en-US" sz="1300" dirty="0"/>
           </a:p>
@@ -26123,7 +26696,7 @@
                 <a:ea typeface="Calibri" pitchFamily="34" charset="-122"/>
                 <a:cs typeface="Calibri" pitchFamily="34" charset="-120"/>
               </a:rPr>
-              <a:t>action happening now</a:t>
+              <a:t>having the quality of</a:t>
             </a:r>
             <a:endParaRPr lang="en-US" sz="850" dirty="0"/>
           </a:p>
@@ -26387,7 +26960,7 @@
                 <a:ea typeface="Trebuchet MS" pitchFamily="34" charset="-122"/>
                 <a:cs typeface="Trebuchet MS" pitchFamily="34" charset="-120"/>
               </a:rPr>
-              <a:t>tract</a:t>
+              <a:t>trac</a:t>
             </a:r>
             <a:endParaRPr lang="en-US" sz="1400" dirty="0"/>
           </a:p>
@@ -26492,7 +27065,7 @@
                 <a:ea typeface="Trebuchet MS" pitchFamily="34" charset="-122"/>
                 <a:cs typeface="Trebuchet MS" pitchFamily="34" charset="-120"/>
               </a:rPr>
-              <a:t>ing</a:t>
+              <a:t>tive</a:t>
             </a:r>
             <a:endParaRPr lang="en-US" sz="1400" dirty="0"/>
           </a:p>
@@ -27055,7 +27628,7 @@
                 <a:ea typeface="Trebuchet MS" pitchFamily="34" charset="-122"/>
                 <a:cs typeface="Trebuchet MS" pitchFamily="34" charset="-120"/>
               </a:rPr>
-              <a:t>attracting</a:t>
+              <a:t>attractive</a:t>
             </a:r>
             <a:endParaRPr lang="en-US" sz="2800" dirty="0"/>
           </a:p>
@@ -27306,7 +27879,7 @@
                 <a:ea typeface="Trebuchet MS" pitchFamily="34" charset="-122"/>
                 <a:cs typeface="Trebuchet MS" pitchFamily="34" charset="-120"/>
               </a:rPr>
-              <a:t>ing</a:t>
+              <a:t>ive</a:t>
             </a:r>
             <a:endParaRPr lang="en-US" sz="1300" dirty="0"/>
           </a:p>
@@ -27345,7 +27918,7 @@
                 <a:ea typeface="Calibri" pitchFamily="34" charset="-122"/>
                 <a:cs typeface="Calibri" pitchFamily="34" charset="-120"/>
               </a:rPr>
-              <a:t>action happening now</a:t>
+              <a:t>having the quality of</a:t>
             </a:r>
             <a:endParaRPr lang="en-US" sz="850" dirty="0"/>
           </a:p>
@@ -27609,7 +28182,7 @@
                 <a:ea typeface="Trebuchet MS" pitchFamily="34" charset="-122"/>
                 <a:cs typeface="Trebuchet MS" pitchFamily="34" charset="-120"/>
               </a:rPr>
-              <a:t>tract</a:t>
+              <a:t>trac</a:t>
             </a:r>
             <a:endParaRPr lang="en-US" sz="1400" dirty="0"/>
           </a:p>
@@ -27714,7 +28287,7 @@
                 <a:ea typeface="Trebuchet MS" pitchFamily="34" charset="-122"/>
                 <a:cs typeface="Trebuchet MS" pitchFamily="34" charset="-120"/>
               </a:rPr>
-              <a:t>ing</a:t>
+              <a:t>tive</a:t>
             </a:r>
             <a:endParaRPr lang="en-US" sz="1400" dirty="0"/>
           </a:p>
@@ -28335,7 +28908,7 @@
                 <a:ea typeface="Trebuchet MS" pitchFamily="34" charset="-122"/>
                 <a:cs typeface="Trebuchet MS" pitchFamily="34" charset="-120"/>
               </a:rPr>
-              <a:t>ng</a:t>
+              <a:t>ve</a:t>
             </a:r>
             <a:endParaRPr lang="en-US" sz="900" dirty="0"/>
           </a:p>
@@ -28766,7 +29339,7 @@
                 <a:ea typeface="Trebuchet MS" pitchFamily="34" charset="-122"/>
                 <a:cs typeface="Trebuchet MS" pitchFamily="34" charset="-120"/>
               </a:rPr>
-              <a:t>attraction</a:t>
+              <a:t>attracted</a:t>
             </a:r>
             <a:endParaRPr lang="en-US" sz="2800" dirty="0"/>
           </a:p>
@@ -29593,7 +30166,7 @@
                 <a:ea typeface="Trebuchet MS" pitchFamily="34" charset="-122"/>
                 <a:cs typeface="Trebuchet MS" pitchFamily="34" charset="-120"/>
               </a:rPr>
-              <a:t>attraction</a:t>
+              <a:t>attracted</a:t>
             </a:r>
             <a:endParaRPr lang="en-US" sz="2800" dirty="0"/>
           </a:p>
@@ -29844,7 +30417,7 @@
                 <a:ea typeface="Trebuchet MS" pitchFamily="34" charset="-122"/>
                 <a:cs typeface="Trebuchet MS" pitchFamily="34" charset="-120"/>
               </a:rPr>
-              <a:t>ion</a:t>
+              <a:t>ed</a:t>
             </a:r>
             <a:endParaRPr lang="en-US" sz="1300" dirty="0"/>
           </a:p>
@@ -29883,7 +30456,7 @@
                 <a:ea typeface="Calibri" pitchFamily="34" charset="-122"/>
                 <a:cs typeface="Calibri" pitchFamily="34" charset="-120"/>
               </a:rPr>
-              <a:t>state or result of an action</a:t>
+              <a:t>happened in the past</a:t>
             </a:r>
             <a:endParaRPr lang="en-US" sz="850" dirty="0"/>
           </a:p>
@@ -30578,7 +31151,7 @@
                 <a:ea typeface="Trebuchet MS" pitchFamily="34" charset="-122"/>
                 <a:cs typeface="Trebuchet MS" pitchFamily="34" charset="-120"/>
               </a:rPr>
-              <a:t>attraction</a:t>
+              <a:t>attracted</a:t>
             </a:r>
             <a:endParaRPr lang="en-US" sz="2800" dirty="0"/>
           </a:p>
@@ -30829,7 +31402,7 @@
                 <a:ea typeface="Trebuchet MS" pitchFamily="34" charset="-122"/>
                 <a:cs typeface="Trebuchet MS" pitchFamily="34" charset="-120"/>
               </a:rPr>
-              <a:t>ion</a:t>
+              <a:t>ed</a:t>
             </a:r>
             <a:endParaRPr lang="en-US" sz="1300" dirty="0"/>
           </a:p>
@@ -30868,7 +31441,7 @@
                 <a:ea typeface="Calibri" pitchFamily="34" charset="-122"/>
                 <a:cs typeface="Calibri" pitchFamily="34" charset="-120"/>
               </a:rPr>
-              <a:t>state or result of an action</a:t>
+              <a:t>happened in the past</a:t>
             </a:r>
             <a:endParaRPr lang="en-US" sz="850" dirty="0"/>
           </a:p>
@@ -31132,7 +31705,7 @@
                 <a:ea typeface="Trebuchet MS" pitchFamily="34" charset="-122"/>
                 <a:cs typeface="Trebuchet MS" pitchFamily="34" charset="-120"/>
               </a:rPr>
-              <a:t>trac</a:t>
+              <a:t>tract</a:t>
             </a:r>
             <a:endParaRPr lang="en-US" sz="1400" dirty="0"/>
           </a:p>
@@ -31237,7 +31810,7 @@
                 <a:ea typeface="Trebuchet MS" pitchFamily="34" charset="-122"/>
                 <a:cs typeface="Trebuchet MS" pitchFamily="34" charset="-120"/>
               </a:rPr>
-              <a:t>tion</a:t>
+              <a:t>ed</a:t>
             </a:r>
             <a:endParaRPr lang="en-US" sz="1400" dirty="0"/>
           </a:p>
@@ -31800,7 +32373,7 @@
                 <a:ea typeface="Trebuchet MS" pitchFamily="34" charset="-122"/>
                 <a:cs typeface="Trebuchet MS" pitchFamily="34" charset="-120"/>
               </a:rPr>
-              <a:t>attraction</a:t>
+              <a:t>attracted</a:t>
             </a:r>
             <a:endParaRPr lang="en-US" sz="2800" dirty="0"/>
           </a:p>
@@ -32051,7 +32624,7 @@
                 <a:ea typeface="Trebuchet MS" pitchFamily="34" charset="-122"/>
                 <a:cs typeface="Trebuchet MS" pitchFamily="34" charset="-120"/>
               </a:rPr>
-              <a:t>ion</a:t>
+              <a:t>ed</a:t>
             </a:r>
             <a:endParaRPr lang="en-US" sz="1300" dirty="0"/>
           </a:p>
@@ -32090,7 +32663,7 @@
                 <a:ea typeface="Calibri" pitchFamily="34" charset="-122"/>
                 <a:cs typeface="Calibri" pitchFamily="34" charset="-120"/>
               </a:rPr>
-              <a:t>state or result of an action</a:t>
+              <a:t>happened in the past</a:t>
             </a:r>
             <a:endParaRPr lang="en-US" sz="850" dirty="0"/>
           </a:p>
@@ -32354,7 +32927,7 @@
                 <a:ea typeface="Trebuchet MS" pitchFamily="34" charset="-122"/>
                 <a:cs typeface="Trebuchet MS" pitchFamily="34" charset="-120"/>
               </a:rPr>
-              <a:t>trac</a:t>
+              <a:t>tract</a:t>
             </a:r>
             <a:endParaRPr lang="en-US" sz="1400" dirty="0"/>
           </a:p>
@@ -32459,7 +33032,7 @@
                 <a:ea typeface="Trebuchet MS" pitchFamily="34" charset="-122"/>
                 <a:cs typeface="Trebuchet MS" pitchFamily="34" charset="-120"/>
               </a:rPr>
-              <a:t>tion</a:t>
+              <a:t>ed</a:t>
             </a:r>
             <a:endParaRPr lang="en-US" sz="1400" dirty="0"/>
           </a:p>
@@ -32540,11 +33113,11 @@
         <p:spPr>
           <a:xfrm>
             <a:off x="1874520" y="4096512"/>
-            <a:ext cx="6903720" cy="804672"/>
+            <a:ext cx="6903720" cy="658368"/>
           </a:xfrm>
           <a:prstGeom prst="rect">
             <a:avLst>
-              <a:gd name="adj" fmla="val 6818"/>
+              <a:gd name="adj" fmla="val 8333"/>
             </a:avLst>
           </a:prstGeom>
           <a:solidFill>
@@ -32567,11 +33140,11 @@
         <p:spPr>
           <a:xfrm>
             <a:off x="2023872" y="4169664"/>
-            <a:ext cx="685800" cy="384048"/>
+            <a:ext cx="685800" cy="475488"/>
           </a:xfrm>
           <a:prstGeom prst="rect">
             <a:avLst>
-              <a:gd name="adj" fmla="val 9524"/>
+              <a:gd name="adj" fmla="val 7692"/>
             </a:avLst>
           </a:prstGeom>
           <a:solidFill>
@@ -32594,7 +33167,7 @@
         <p:spPr>
           <a:xfrm>
             <a:off x="2023872" y="4169664"/>
-            <a:ext cx="685800" cy="384048"/>
+            <a:ext cx="685800" cy="475488"/>
           </a:xfrm>
           <a:prstGeom prst="rect">
             <a:avLst/>
@@ -32633,11 +33206,11 @@
         <p:spPr>
           <a:xfrm>
             <a:off x="2831592" y="4169664"/>
-            <a:ext cx="685800" cy="384048"/>
+            <a:ext cx="685800" cy="475488"/>
           </a:xfrm>
           <a:prstGeom prst="rect">
             <a:avLst>
-              <a:gd name="adj" fmla="val 9524"/>
+              <a:gd name="adj" fmla="val 7692"/>
             </a:avLst>
           </a:prstGeom>
           <a:solidFill>
@@ -32660,7 +33233,7 @@
         <p:spPr>
           <a:xfrm>
             <a:off x="2831592" y="4169664"/>
-            <a:ext cx="685800" cy="384048"/>
+            <a:ext cx="685800" cy="475488"/>
           </a:xfrm>
           <a:prstGeom prst="rect">
             <a:avLst/>
@@ -32699,11 +33272,11 @@
         <p:spPr>
           <a:xfrm>
             <a:off x="3639312" y="4169664"/>
-            <a:ext cx="685800" cy="384048"/>
+            <a:ext cx="685800" cy="475488"/>
           </a:xfrm>
           <a:prstGeom prst="rect">
             <a:avLst>
-              <a:gd name="adj" fmla="val 9524"/>
+              <a:gd name="adj" fmla="val 7692"/>
             </a:avLst>
           </a:prstGeom>
           <a:solidFill>
@@ -32726,7 +33299,7 @@
         <p:spPr>
           <a:xfrm>
             <a:off x="3639312" y="4169664"/>
-            <a:ext cx="685800" cy="384048"/>
+            <a:ext cx="685800" cy="475488"/>
           </a:xfrm>
           <a:prstGeom prst="rect">
             <a:avLst/>
@@ -32765,11 +33338,11 @@
         <p:spPr>
           <a:xfrm>
             <a:off x="4447032" y="4169664"/>
-            <a:ext cx="685800" cy="384048"/>
+            <a:ext cx="685800" cy="475488"/>
           </a:xfrm>
           <a:prstGeom prst="rect">
             <a:avLst>
-              <a:gd name="adj" fmla="val 9524"/>
+              <a:gd name="adj" fmla="val 7692"/>
             </a:avLst>
           </a:prstGeom>
           <a:solidFill>
@@ -32792,7 +33365,7 @@
         <p:spPr>
           <a:xfrm>
             <a:off x="4447032" y="4169664"/>
-            <a:ext cx="685800" cy="384048"/>
+            <a:ext cx="685800" cy="475488"/>
           </a:xfrm>
           <a:prstGeom prst="rect">
             <a:avLst/>
@@ -32831,11 +33404,11 @@
         <p:spPr>
           <a:xfrm>
             <a:off x="5254752" y="4169664"/>
-            <a:ext cx="685800" cy="384048"/>
+            <a:ext cx="685800" cy="475488"/>
           </a:xfrm>
           <a:prstGeom prst="rect">
             <a:avLst>
-              <a:gd name="adj" fmla="val 9524"/>
+              <a:gd name="adj" fmla="val 7692"/>
             </a:avLst>
           </a:prstGeom>
           <a:solidFill>
@@ -32858,7 +33431,7 @@
         <p:spPr>
           <a:xfrm>
             <a:off x="5254752" y="4169664"/>
-            <a:ext cx="685800" cy="384048"/>
+            <a:ext cx="685800" cy="475488"/>
           </a:xfrm>
           <a:prstGeom prst="rect">
             <a:avLst/>
@@ -32897,11 +33470,11 @@
         <p:spPr>
           <a:xfrm>
             <a:off x="6062472" y="4169664"/>
-            <a:ext cx="685800" cy="384048"/>
+            <a:ext cx="685800" cy="475488"/>
           </a:xfrm>
           <a:prstGeom prst="rect">
             <a:avLst>
-              <a:gd name="adj" fmla="val 9524"/>
+              <a:gd name="adj" fmla="val 7692"/>
             </a:avLst>
           </a:prstGeom>
           <a:solidFill>
@@ -32924,7 +33497,7 @@
         <p:spPr>
           <a:xfrm>
             <a:off x="6062472" y="4169664"/>
-            <a:ext cx="685800" cy="384048"/>
+            <a:ext cx="685800" cy="475488"/>
           </a:xfrm>
           <a:prstGeom prst="rect">
             <a:avLst/>
@@ -32963,11 +33536,11 @@
         <p:spPr>
           <a:xfrm>
             <a:off x="6870192" y="4169664"/>
-            <a:ext cx="685800" cy="384048"/>
+            <a:ext cx="685800" cy="475488"/>
           </a:xfrm>
           <a:prstGeom prst="rect">
             <a:avLst>
-              <a:gd name="adj" fmla="val 9524"/>
+              <a:gd name="adj" fmla="val 7692"/>
             </a:avLst>
           </a:prstGeom>
           <a:solidFill>
@@ -32990,7 +33563,7 @@
         <p:spPr>
           <a:xfrm>
             <a:off x="6870192" y="4169664"/>
-            <a:ext cx="685800" cy="384048"/>
+            <a:ext cx="685800" cy="475488"/>
           </a:xfrm>
           <a:prstGeom prst="rect">
             <a:avLst/>
@@ -33014,7 +33587,7 @@
                 <a:ea typeface="Trebuchet MS" pitchFamily="34" charset="-122"/>
                 <a:cs typeface="Trebuchet MS" pitchFamily="34" charset="-120"/>
               </a:rPr>
-              <a:t>io</a:t>
+              <a:t>e</a:t>
             </a:r>
             <a:endParaRPr lang="en-US" sz="900" dirty="0"/>
           </a:p>
@@ -33022,57 +33595,18 @@
       </p:sp>
       <p:sp>
         <p:nvSpPr>
-          <p:cNvPr id="50" name="Text 48"/>
-          <p:cNvSpPr/>
-          <p:nvPr/>
-        </p:nvSpPr>
-        <p:spPr>
-          <a:xfrm>
-            <a:off x="6870192" y="4572000"/>
-            <a:ext cx="685800" cy="219456"/>
-          </a:xfrm>
-          <a:prstGeom prst="rect">
-            <a:avLst/>
-          </a:prstGeom>
-          <a:noFill/>
-          <a:ln/>
-        </p:spPr>
-        <p:txBody>
-          <a:bodyPr wrap="square" lIns="0" tIns="0" rIns="0" bIns="0" rtlCol="0" anchor="t"/>
-          <a:lstStyle/>
-          <a:p>
-            <a:pPr algn="ctr" indent="0" marL="0">
-              <a:buNone/>
-            </a:pPr>
-            <a:r>
-              <a:rPr lang="en-US" sz="750" i="1" dirty="0">
-                <a:solidFill>
-                  <a:srgbClr val="94A3B8"/>
-                </a:solidFill>
-                <a:latin typeface="Calibri" pitchFamily="34" charset="0"/>
-                <a:ea typeface="Calibri" pitchFamily="34" charset="-122"/>
-                <a:cs typeface="Calibri" pitchFamily="34" charset="-120"/>
-              </a:rPr>
-              <a:t>/sh/</a:t>
-            </a:r>
-            <a:endParaRPr lang="en-US" sz="750" dirty="0"/>
-          </a:p>
-        </p:txBody>
-      </p:sp>
-      <p:sp>
-        <p:nvSpPr>
-          <p:cNvPr id="51" name="Shape 49"/>
+          <p:cNvPr id="50" name="Shape 48"/>
           <p:cNvSpPr/>
           <p:nvPr/>
         </p:nvSpPr>
         <p:spPr>
           <a:xfrm>
             <a:off x="7677912" y="4169664"/>
-            <a:ext cx="685800" cy="384048"/>
+            <a:ext cx="685800" cy="475488"/>
           </a:xfrm>
           <a:prstGeom prst="rect">
             <a:avLst>
-              <a:gd name="adj" fmla="val 9524"/>
+              <a:gd name="adj" fmla="val 7692"/>
             </a:avLst>
           </a:prstGeom>
           <a:solidFill>
@@ -33088,14 +33622,14 @@
       </p:sp>
       <p:sp>
         <p:nvSpPr>
-          <p:cNvPr id="52" name="Text 50"/>
+          <p:cNvPr id="51" name="Text 49"/>
           <p:cNvSpPr/>
           <p:nvPr/>
         </p:nvSpPr>
         <p:spPr>
           <a:xfrm>
             <a:off x="7677912" y="4169664"/>
-            <a:ext cx="685800" cy="384048"/>
+            <a:ext cx="685800" cy="475488"/>
           </a:xfrm>
           <a:prstGeom prst="rect">
             <a:avLst/>
@@ -33119,7 +33653,7 @@
                 <a:ea typeface="Trebuchet MS" pitchFamily="34" charset="-122"/>
                 <a:cs typeface="Trebuchet MS" pitchFamily="34" charset="-120"/>
               </a:rPr>
-              <a:t>n</a:t>
+              <a:t>d</a:t>
             </a:r>
             <a:endParaRPr lang="en-US" sz="900" dirty="0"/>
           </a:p>
@@ -35226,7 +35760,7 @@
                 <a:ea typeface="Trebuchet MS" pitchFamily="34" charset="-122"/>
                 <a:cs typeface="Trebuchet MS" pitchFamily="34" charset="-120"/>
               </a:rPr>
-              <a:t>counter-</a:t>
+              <a:t>con-</a:t>
             </a:r>
             <a:endParaRPr lang="en-US" sz="1300" dirty="0"/>
           </a:p>
@@ -35315,7 +35849,7 @@
                 <a:ea typeface="Trebuchet MS" pitchFamily="34" charset="-122"/>
                 <a:cs typeface="Trebuchet MS" pitchFamily="34" charset="-120"/>
               </a:rPr>
-              <a:t>-ively</a:t>
+              <a:t>-ness</a:t>
             </a:r>
             <a:endParaRPr lang="en-US" sz="1300" dirty="0"/>
           </a:p>
@@ -35379,7 +35913,7 @@
                 <a:ea typeface="Trebuchet MS" pitchFamily="34" charset="-122"/>
                 <a:cs typeface="Trebuchet MS" pitchFamily="34" charset="-120"/>
               </a:rPr>
-              <a:t>sub-</a:t>
+              <a:t>over-</a:t>
             </a:r>
             <a:endParaRPr lang="en-US" sz="1300" dirty="0"/>
           </a:p>
@@ -35468,7 +36002,7 @@
                 <a:ea typeface="Trebuchet MS" pitchFamily="34" charset="-122"/>
                 <a:cs typeface="Trebuchet MS" pitchFamily="34" charset="-120"/>
               </a:rPr>
-              <a:t>-iveness</a:t>
+              <a:t>-ed</a:t>
             </a:r>
             <a:endParaRPr lang="en-US" sz="1300" dirty="0"/>
           </a:p>
@@ -35532,7 +36066,7 @@
                 <a:ea typeface="Trebuchet MS" pitchFamily="34" charset="-122"/>
                 <a:cs typeface="Trebuchet MS" pitchFamily="34" charset="-120"/>
               </a:rPr>
-              <a:t>over-</a:t>
+              <a:t>sub-</a:t>
             </a:r>
             <a:endParaRPr lang="en-US" sz="1300" dirty="0"/>
           </a:p>
@@ -35621,7 +36155,7 @@
                 <a:ea typeface="Trebuchet MS" pitchFamily="34" charset="-122"/>
                 <a:cs typeface="Trebuchet MS" pitchFamily="34" charset="-120"/>
               </a:rPr>
-              <a:t>-ed</a:t>
+              <a:t>-ing</a:t>
             </a:r>
             <a:endParaRPr lang="en-US" sz="1300" dirty="0"/>
           </a:p>
@@ -35924,7 +36458,7 @@
                 <a:ea typeface="Trebuchet MS" pitchFamily="34" charset="-122"/>
                 <a:cs typeface="Trebuchet MS" pitchFamily="34" charset="-120"/>
               </a:rPr>
-              <a:t>attractively</a:t>
+              <a:t>attractiveness</a:t>
             </a:r>
             <a:endParaRPr lang="en-US" sz="1200" dirty="0"/>
           </a:p>
@@ -35990,7 +36524,7 @@
                 <a:ea typeface="Trebuchet MS" pitchFamily="34" charset="-122"/>
                 <a:cs typeface="Trebuchet MS" pitchFamily="34" charset="-120"/>
               </a:rPr>
-              <a:t>attractiveness</a:t>
+              <a:t>attracted</a:t>
             </a:r>
             <a:endParaRPr lang="en-US" sz="1200" dirty="0"/>
           </a:p>
@@ -36056,7 +36590,7 @@
                 <a:ea typeface="Trebuchet MS" pitchFamily="34" charset="-122"/>
                 <a:cs typeface="Trebuchet MS" pitchFamily="34" charset="-120"/>
               </a:rPr>
-              <a:t>attracted</a:t>
+              <a:t>attracting</a:t>
             </a:r>
             <a:endParaRPr lang="en-US" sz="1200" dirty="0"/>
           </a:p>
@@ -36188,7 +36722,7 @@
                 <a:ea typeface="Trebuchet MS" pitchFamily="34" charset="-122"/>
                 <a:cs typeface="Trebuchet MS" pitchFamily="34" charset="-120"/>
               </a:rPr>
-              <a:t>attracting</a:t>
+              <a:t>distracting</a:t>
             </a:r>
             <a:endParaRPr lang="en-US" sz="1200" dirty="0"/>
           </a:p>
@@ -37376,7 +37910,7 @@
                 <a:ea typeface="Calibri" pitchFamily="34" charset="-122"/>
                 <a:cs typeface="Calibri" pitchFamily="34" charset="-120"/>
               </a:rPr>
-              <a:t>1.  The root 'attract' comes from Latin and means to draw or pull toward something.</a:t>
+              <a:t>1.  Adding the suffix '-ion' to 'attract' makes the noun 'attraction'.</a:t>
             </a:r>
             <a:endParaRPr lang="en-US" sz="1300" dirty="0"/>
           </a:p>
@@ -37515,7 +38049,7 @@
                 <a:ea typeface="Calibri" pitchFamily="34" charset="-122"/>
                 <a:cs typeface="Calibri" pitchFamily="34" charset="-120"/>
               </a:rPr>
-              <a:t>2.  The word 'attractive' means to push something away.</a:t>
+              <a:t>2.  The word 'unattractive' means something that draws a lot of attention.</a:t>
             </a:r>
             <a:endParaRPr lang="en-US" sz="1300" dirty="0"/>
           </a:p>
@@ -37654,7 +38188,7 @@
                 <a:ea typeface="Calibri" pitchFamily="34" charset="-122"/>
                 <a:cs typeface="Calibri" pitchFamily="34" charset="-120"/>
               </a:rPr>
-              <a:t>3.  Adding the prefix 'un-' to 'attractive' makes a word meaning not pleasing.</a:t>
+              <a:t>3.  The suffix '-ive' in 'attractive' turns the word into a verb.</a:t>
             </a:r>
             <a:endParaRPr lang="en-US" sz="1300" dirty="0"/>
           </a:p>
@@ -37677,11 +38211,11 @@
             </a:avLst>
           </a:prstGeom>
           <a:solidFill>
-            <a:srgbClr val="DCFCE7"/>
-          </a:solidFill>
-          <a:ln w="12700">
-            <a:solidFill>
-              <a:srgbClr val="16A34A"/>
+            <a:srgbClr val="FEE2E2"/>
+          </a:solidFill>
+          <a:ln w="12700">
+            <a:solidFill>
+              <a:srgbClr val="DC2626"/>
             </a:solidFill>
             <a:prstDash val="solid"/>
           </a:ln>
@@ -37714,13 +38248,13 @@
             <a:r>
               <a:rPr lang="en-US" sz="1100" b="1" dirty="0">
                 <a:solidFill>
-                  <a:srgbClr val="16A34A"/>
+                  <a:srgbClr val="DC2626"/>
                 </a:solidFill>
                 <a:latin typeface="Trebuchet MS" pitchFamily="34" charset="0"/>
                 <a:ea typeface="Trebuchet MS" pitchFamily="34" charset="-122"/>
                 <a:cs typeface="Trebuchet MS" pitchFamily="34" charset="-120"/>
               </a:rPr>
-              <a:t>TRUE</a:t>
+              <a:t>FALSE</a:t>
             </a:r>
             <a:endParaRPr lang="en-US" sz="1100" dirty="0"/>
           </a:p>
@@ -37793,7 +38327,7 @@
                 <a:ea typeface="Calibri" pitchFamily="34" charset="-122"/>
                 <a:cs typeface="Calibri" pitchFamily="34" charset="-120"/>
               </a:rPr>
-              <a:t>4.  The word 'attraction' contains the root 'attract' plus the suffix '-ion'.</a:t>
+              <a:t>4.  The root 'attract' comes from Latin and means to draw or pull toward.</a:t>
             </a:r>
             <a:endParaRPr lang="en-US" sz="1300" dirty="0"/>
           </a:p>
@@ -37932,7 +38466,7 @@
                 <a:ea typeface="Calibri" pitchFamily="34" charset="-122"/>
                 <a:cs typeface="Calibri" pitchFamily="34" charset="-120"/>
               </a:rPr>
-              <a:t>5.  The root 'attract' originally came from the Greek language.</a:t>
+              <a:t>5.  The prefix 'un-' means 'not', so 'unattractive' means not attractive.</a:t>
             </a:r>
             <a:endParaRPr lang="en-US" sz="1300" dirty="0"/>
           </a:p>
@@ -37955,11 +38489,11 @@
             </a:avLst>
           </a:prstGeom>
           <a:solidFill>
-            <a:srgbClr val="FEE2E2"/>
-          </a:solidFill>
-          <a:ln w="12700">
-            <a:solidFill>
-              <a:srgbClr val="DC2626"/>
+            <a:srgbClr val="DCFCE7"/>
+          </a:solidFill>
+          <a:ln w="12700">
+            <a:solidFill>
+              <a:srgbClr val="16A34A"/>
             </a:solidFill>
             <a:prstDash val="solid"/>
           </a:ln>
@@ -37992,13 +38526,13 @@
             <a:r>
               <a:rPr lang="en-US" sz="1100" b="1" dirty="0">
                 <a:solidFill>
-                  <a:srgbClr val="DC2626"/>
+                  <a:srgbClr val="16A34A"/>
                 </a:solidFill>
                 <a:latin typeface="Trebuchet MS" pitchFamily="34" charset="0"/>
                 <a:ea typeface="Trebuchet MS" pitchFamily="34" charset="-122"/>
                 <a:cs typeface="Trebuchet MS" pitchFamily="34" charset="-120"/>
               </a:rPr>
-              <a:t>FALSE</a:t>
+              <a:t>TRUE</a:t>
             </a:r>
             <a:endParaRPr lang="en-US" sz="1100" dirty="0"/>
           </a:p>
@@ -38769,7 +39303,7 @@
                 <a:ea typeface="Trebuchet MS" pitchFamily="34" charset="-122"/>
                 <a:cs typeface="Trebuchet MS" pitchFamily="34" charset="-120"/>
               </a:rPr>
-              <a:t>attractively</a:t>
+              <a:t>attractiveness</a:t>
             </a:r>
             <a:endParaRPr lang="en-US" sz="1300" dirty="0"/>
           </a:p>
@@ -38835,7 +39369,7 @@
                 <a:ea typeface="Trebuchet MS" pitchFamily="34" charset="-122"/>
                 <a:cs typeface="Trebuchet MS" pitchFamily="34" charset="-120"/>
               </a:rPr>
-              <a:t>attractiveness</a:t>
+              <a:t>attracted</a:t>
             </a:r>
             <a:endParaRPr lang="en-US" sz="1300" dirty="0"/>
           </a:p>
@@ -38901,7 +39435,7 @@
                 <a:ea typeface="Trebuchet MS" pitchFamily="34" charset="-122"/>
                 <a:cs typeface="Trebuchet MS" pitchFamily="34" charset="-120"/>
               </a:rPr>
-              <a:t>attracted</a:t>
+              <a:t>attracting</a:t>
             </a:r>
             <a:endParaRPr lang="en-US" sz="1300" dirty="0"/>
           </a:p>
@@ -39905,7 +40439,7 @@
                 <a:ea typeface="Trebuchet MS" pitchFamily="34" charset="-122"/>
                 <a:cs typeface="Trebuchet MS" pitchFamily="34" charset="-120"/>
               </a:rPr>
-              <a:t>counter-</a:t>
+              <a:t>con-</a:t>
             </a:r>
             <a:endParaRPr lang="en-US" sz="1300" dirty="0"/>
           </a:p>
@@ -39994,7 +40528,7 @@
                 <a:ea typeface="Trebuchet MS" pitchFamily="34" charset="-122"/>
                 <a:cs typeface="Trebuchet MS" pitchFamily="34" charset="-120"/>
               </a:rPr>
-              <a:t>-ively</a:t>
+              <a:t>-ness</a:t>
             </a:r>
             <a:endParaRPr lang="en-US" sz="1300" dirty="0"/>
           </a:p>
@@ -40058,7 +40592,7 @@
                 <a:ea typeface="Trebuchet MS" pitchFamily="34" charset="-122"/>
                 <a:cs typeface="Trebuchet MS" pitchFamily="34" charset="-120"/>
               </a:rPr>
-              <a:t>sub-</a:t>
+              <a:t>over-</a:t>
             </a:r>
             <a:endParaRPr lang="en-US" sz="1300" dirty="0"/>
           </a:p>
@@ -40147,7 +40681,7 @@
                 <a:ea typeface="Trebuchet MS" pitchFamily="34" charset="-122"/>
                 <a:cs typeface="Trebuchet MS" pitchFamily="34" charset="-120"/>
               </a:rPr>
-              <a:t>-iveness</a:t>
+              <a:t>-ed</a:t>
             </a:r>
             <a:endParaRPr lang="en-US" sz="1300" dirty="0"/>
           </a:p>
@@ -40211,7 +40745,7 @@
                 <a:ea typeface="Trebuchet MS" pitchFamily="34" charset="-122"/>
                 <a:cs typeface="Trebuchet MS" pitchFamily="34" charset="-120"/>
               </a:rPr>
-              <a:t>over-</a:t>
+              <a:t>sub-</a:t>
             </a:r>
             <a:endParaRPr lang="en-US" sz="1300" dirty="0"/>
           </a:p>
@@ -40300,7 +40834,7 @@
                 <a:ea typeface="Trebuchet MS" pitchFamily="34" charset="-122"/>
                 <a:cs typeface="Trebuchet MS" pitchFamily="34" charset="-120"/>
               </a:rPr>
-              <a:t>-ed</a:t>
+              <a:t>-ing</a:t>
             </a:r>
             <a:endParaRPr lang="en-US" sz="1300" dirty="0"/>
           </a:p>
@@ -41211,7 +41745,7 @@
                 <a:ea typeface="Calibri" pitchFamily="34" charset="-122"/>
                 <a:cs typeface="Calibri" pitchFamily="34" charset="-120"/>
               </a:rPr>
-              <a:t>The quality of being pleasing and drawing people's interest.</a:t>
+              <a:t>When something has already drawn your interest or pulled you toward it.</a:t>
             </a:r>
             <a:endParaRPr lang="en-US" sz="1200" dirty="0"/>
           </a:p>
@@ -41350,7 +41884,7 @@
                 <a:ea typeface="Calibri" pitchFamily="34" charset="-122"/>
                 <a:cs typeface="Calibri" pitchFamily="34" charset="-120"/>
               </a:rPr>
-              <a:t>Done in a way that is pleasing and draws people's attention.</a:t>
+              <a:t>The quality of being pleasing or interesting enough to draw people in.</a:t>
             </a:r>
             <a:endParaRPr lang="en-US" sz="1200" dirty="0"/>
           </a:p>
@@ -41489,7 +42023,7 @@
                 <a:ea typeface="Calibri" pitchFamily="34" charset="-122"/>
                 <a:cs typeface="Calibri" pitchFamily="34" charset="-120"/>
               </a:rPr>
-              <a:t>When someone or something has been drawn toward another thing.</a:t>
+              <a:t>The act of drawing interest or pulling something toward you right now.</a:t>
             </a:r>
             <a:endParaRPr lang="en-US" sz="1200" dirty="0"/>
           </a:p>
@@ -41562,7 +42096,7 @@
                 <a:ea typeface="Trebuchet MS" pitchFamily="34" charset="-122"/>
                 <a:cs typeface="Trebuchet MS" pitchFamily="34" charset="-120"/>
               </a:rPr>
-              <a:t>attractively</a:t>
+              <a:t>attractiveness</a:t>
             </a:r>
             <a:endParaRPr lang="en-US" sz="1200" dirty="0"/>
           </a:p>
@@ -41628,7 +42162,7 @@
                 <a:ea typeface="Calibri" pitchFamily="34" charset="-122"/>
                 <a:cs typeface="Calibri" pitchFamily="34" charset="-120"/>
               </a:rPr>
-              <a:t>Something or someone that is pleasing and draws people's interest.</a:t>
+              <a:t>Something or someone that is pleasing and draws people's interest or attention.</a:t>
             </a:r>
             <a:endParaRPr lang="en-US" sz="1200" dirty="0"/>
           </a:p>
@@ -41701,7 +42235,7 @@
                 <a:ea typeface="Trebuchet MS" pitchFamily="34" charset="-122"/>
                 <a:cs typeface="Trebuchet MS" pitchFamily="34" charset="-120"/>
               </a:rPr>
-              <a:t>attractiveness</a:t>
+              <a:t>attracted</a:t>
             </a:r>
             <a:endParaRPr lang="en-US" sz="1200" dirty="0"/>
           </a:p>
@@ -41767,7 +42301,7 @@
                 <a:ea typeface="Calibri" pitchFamily="34" charset="-122"/>
                 <a:cs typeface="Calibri" pitchFamily="34" charset="-120"/>
               </a:rPr>
-              <a:t>Not pleasing or not drawing people's interest or attention.</a:t>
+              <a:t>Something that does not draw people's interest or is not pleasing to look at.</a:t>
             </a:r>
             <a:endParaRPr lang="en-US" sz="1200" dirty="0"/>
           </a:p>
@@ -41840,7 +42374,7 @@
                 <a:ea typeface="Trebuchet MS" pitchFamily="34" charset="-122"/>
                 <a:cs typeface="Trebuchet MS" pitchFamily="34" charset="-120"/>
               </a:rPr>
-              <a:t>attracted</a:t>
+              <a:t>attracting</a:t>
             </a:r>
             <a:endParaRPr lang="en-US" sz="1200" dirty="0"/>
           </a:p>
@@ -42045,7 +42579,7 @@
                 <a:ea typeface="Calibri" pitchFamily="34" charset="-122"/>
                 <a:cs typeface="Calibri" pitchFamily="34" charset="-120"/>
               </a:rPr>
-              <a:t>The power to draw people or things closer, like the attraction of a fun theme park.</a:t>
+              <a:t>The power to draw people or things closer, like a fun ride at a theme park.</a:t>
             </a:r>
             <a:endParaRPr lang="en-US" sz="1200" dirty="0"/>
           </a:p>
@@ -42704,7 +43238,7 @@
                 <a:ea typeface="Calibri" pitchFamily="34" charset="-122"/>
                 <a:cs typeface="Calibri" pitchFamily="34" charset="-120"/>
               </a:rPr>
-              <a:t>The new water park is the biggest attraction in our town during summer.</a:t>
+              <a:t>The new water park is a major attraction for families visiting the town this summer.</a:t>
             </a:r>
             <a:endParaRPr lang="en-US" sz="1500" dirty="0"/>
           </a:p>
@@ -42868,7 +43402,7 @@
                 <a:ea typeface="Calibri" pitchFamily="34" charset="-122"/>
                 <a:cs typeface="Calibri" pitchFamily="34" charset="-120"/>
               </a:rPr>
-              <a:t>She arranged the display in an attractive way so that customers would notice it.</a:t>
+              <a:t>She wore an attractive costume to the school parade and won first prize.</a:t>
             </a:r>
             <a:endParaRPr lang="en-US" sz="1500" dirty="0"/>
           </a:p>
